--- a/參賽準備/參賽文件/SQL_SPA_Tools_競賽簡報.pptx
+++ b/參賽準備/參賽文件/SQL_SPA_Tools_競賽簡報.pptx
@@ -20988,127 +20988,6 @@
       </p:grpSpPr>
       <p:sp>
         <p:nvSpPr>
-          <p:cNvPr id="19" name="矩形 18">
-            <a:extLst>
-              <a:ext uri="{FF2B5EF4-FFF2-40B4-BE49-F238E27FC236}">
-                <a16:creationId xmlns:a16="http://schemas.microsoft.com/office/drawing/2014/main" id="{016688A2-1258-47E7-A1DF-70A54AA1563B}"/>
-              </a:ext>
-            </a:extLst>
-          </p:cNvPr>
-          <p:cNvSpPr>
-            <a:spLocks noGrp="1"/>
-          </p:cNvSpPr>
-          <p:nvPr/>
-        </p:nvSpPr>
-        <p:spPr>
-          <a:xfrm>
-            <a:off x="552450" y="266700"/>
-            <a:ext cx="2476500" cy="247650"/>
-          </a:xfrm>
-          <a:prstGeom prst="rect">
-            <a:avLst/>
-          </a:prstGeom>
-          <a:noFill/>
-          <a:ln w="0">
-            <a:noFill/>
-            <a:prstDash val="solid"/>
-          </a:ln>
-        </p:spPr>
-        <p:txBody>
-          <a:bodyPr/>
-          <a:lstStyle>
-            <a:defPPr>
-              <a:defRPr sz="1125" b="1">
-                <a:solidFill>
-                  <a:srgbClr val="202A33"/>
-                </a:solidFill>
-              </a:defRPr>
-            </a:defPPr>
-            <a:lvl1pPr>
-              <a:defRPr sz="1125" b="1">
-                <a:solidFill>
-                  <a:srgbClr val="202A33"/>
-                </a:solidFill>
-              </a:defRPr>
-            </a:lvl1pPr>
-            <a:lvl2pPr>
-              <a:defRPr sz="1125" b="1">
-                <a:solidFill>
-                  <a:srgbClr val="202A33"/>
-                </a:solidFill>
-              </a:defRPr>
-            </a:lvl2pPr>
-            <a:lvl3pPr>
-              <a:defRPr sz="1125" b="1">
-                <a:solidFill>
-                  <a:srgbClr val="202A33"/>
-                </a:solidFill>
-              </a:defRPr>
-            </a:lvl3pPr>
-            <a:lvl4pPr>
-              <a:defRPr sz="1125" b="1">
-                <a:solidFill>
-                  <a:srgbClr val="202A33"/>
-                </a:solidFill>
-              </a:defRPr>
-            </a:lvl4pPr>
-            <a:lvl5pPr>
-              <a:defRPr sz="1125" b="1">
-                <a:solidFill>
-                  <a:srgbClr val="202A33"/>
-                </a:solidFill>
-              </a:defRPr>
-            </a:lvl5pPr>
-            <a:lvl6pPr>
-              <a:defRPr sz="1125" b="1">
-                <a:solidFill>
-                  <a:srgbClr val="202A33"/>
-                </a:solidFill>
-              </a:defRPr>
-            </a:lvl6pPr>
-            <a:lvl7pPr>
-              <a:defRPr sz="1125" b="1">
-                <a:solidFill>
-                  <a:srgbClr val="202A33"/>
-                </a:solidFill>
-              </a:defRPr>
-            </a:lvl7pPr>
-            <a:lvl8pPr>
-              <a:defRPr sz="1125" b="1">
-                <a:solidFill>
-                  <a:srgbClr val="202A33"/>
-                </a:solidFill>
-              </a:defRPr>
-            </a:lvl8pPr>
-            <a:lvl9pPr>
-              <a:defRPr sz="1125" b="1">
-                <a:solidFill>
-                  <a:srgbClr val="202A33"/>
-                </a:solidFill>
-              </a:defRPr>
-            </a:lvl9pPr>
-          </a:lstStyle>
-          <a:p>
-            <a:pPr>
-              <a:defRPr sz="1125" b="1">
-                <a:solidFill>
-                  <a:srgbClr val="202A33"/>
-                </a:solidFill>
-              </a:defRPr>
-            </a:pPr>
-            <a:r>
-              <a:rPr sz="1125" b="1">
-                <a:solidFill>
-                  <a:srgbClr val="202A33"/>
-                </a:solidFill>
-              </a:rPr>
-              <a:t>SQL SPA TOOLS</a:t>
-            </a:r>
-          </a:p>
-        </p:txBody>
-      </p:sp>
-      <p:sp>
-        <p:nvSpPr>
           <p:cNvPr id="2" name="矩形 1">
             <a:extLst>
               <a:ext uri="{FF2B5EF4-FFF2-40B4-BE49-F238E27FC236}">
@@ -21218,13 +21097,20 @@
               </a:defRPr>
             </a:pPr>
             <a:r>
-              <a:rPr sz="2850" b="1">
-                <a:solidFill>
-                  <a:srgbClr val="202A33"/>
-                </a:solidFill>
+              <a:rPr lang="zh-TW" altLang="en-US" sz="2850" b="1">
+                <a:solidFill>
+                  <a:srgbClr val="202A33"/>
+                </a:solidFill>
+                <a:latin typeface="Microsoft JhengHei" panose="020B0604030504040204" pitchFamily="34" charset="-120"/>
               </a:rPr>
-              <a:t>效率改善以配對試次計算，現階段不預設節省率</a:t>
+              <a:t>成本效益以情境假設估算，實際結果待配對量測</a:t>
             </a:r>
+            <a:endParaRPr sz="2850" b="1">
+              <a:solidFill>
+                <a:srgbClr val="202A33"/>
+              </a:solidFill>
+              <a:latin typeface="Microsoft JhengHei" panose="020B0604030504040204" pitchFamily="34" charset="-120"/>
+            </a:endParaRPr>
           </a:p>
         </p:txBody>
       </p:sp>
@@ -21261,1278 +21147,6 @@
       </p:sp>
       <p:sp>
         <p:nvSpPr>
-          <p:cNvPr id="4" name="矩形 3">
-            <a:extLst>
-              <a:ext uri="{FF2B5EF4-FFF2-40B4-BE49-F238E27FC236}">
-                <a16:creationId xmlns:a16="http://schemas.microsoft.com/office/drawing/2014/main" id="{8267E999-BBD8-4EF8-9AA1-97F082CA5802}"/>
-              </a:ext>
-            </a:extLst>
-          </p:cNvPr>
-          <p:cNvSpPr>
-            <a:spLocks noGrp="1"/>
-          </p:cNvSpPr>
-          <p:nvPr/>
-        </p:nvSpPr>
-        <p:spPr>
-          <a:xfrm>
-            <a:off x="552450" y="6477000"/>
-            <a:ext cx="11087100" cy="190500"/>
-          </a:xfrm>
-          <a:prstGeom prst="rect">
-            <a:avLst/>
-          </a:prstGeom>
-          <a:noFill/>
-          <a:ln w="0">
-            <a:noFill/>
-            <a:prstDash val="solid"/>
-          </a:ln>
-        </p:spPr>
-        <p:txBody>
-          <a:bodyPr/>
-          <a:lstStyle>
-            <a:defPPr>
-              <a:defRPr sz="900" b="0">
-                <a:solidFill>
-                  <a:srgbClr val="59656E"/>
-                </a:solidFill>
-              </a:defRPr>
-            </a:defPPr>
-            <a:lvl1pPr>
-              <a:defRPr sz="900" b="0">
-                <a:solidFill>
-                  <a:srgbClr val="59656E"/>
-                </a:solidFill>
-              </a:defRPr>
-            </a:lvl1pPr>
-            <a:lvl2pPr>
-              <a:defRPr sz="900" b="0">
-                <a:solidFill>
-                  <a:srgbClr val="59656E"/>
-                </a:solidFill>
-              </a:defRPr>
-            </a:lvl2pPr>
-            <a:lvl3pPr>
-              <a:defRPr sz="900" b="0">
-                <a:solidFill>
-                  <a:srgbClr val="59656E"/>
-                </a:solidFill>
-              </a:defRPr>
-            </a:lvl3pPr>
-            <a:lvl4pPr>
-              <a:defRPr sz="900" b="0">
-                <a:solidFill>
-                  <a:srgbClr val="59656E"/>
-                </a:solidFill>
-              </a:defRPr>
-            </a:lvl4pPr>
-            <a:lvl5pPr>
-              <a:defRPr sz="900" b="0">
-                <a:solidFill>
-                  <a:srgbClr val="59656E"/>
-                </a:solidFill>
-              </a:defRPr>
-            </a:lvl5pPr>
-            <a:lvl6pPr>
-              <a:defRPr sz="900" b="0">
-                <a:solidFill>
-                  <a:srgbClr val="59656E"/>
-                </a:solidFill>
-              </a:defRPr>
-            </a:lvl6pPr>
-            <a:lvl7pPr>
-              <a:defRPr sz="900" b="0">
-                <a:solidFill>
-                  <a:srgbClr val="59656E"/>
-                </a:solidFill>
-              </a:defRPr>
-            </a:lvl7pPr>
-            <a:lvl8pPr>
-              <a:defRPr sz="900" b="0">
-                <a:solidFill>
-                  <a:srgbClr val="59656E"/>
-                </a:solidFill>
-              </a:defRPr>
-            </a:lvl8pPr>
-            <a:lvl9pPr>
-              <a:defRPr sz="900" b="0">
-                <a:solidFill>
-                  <a:srgbClr val="59656E"/>
-                </a:solidFill>
-              </a:defRPr>
-            </a:lvl9pPr>
-          </a:lstStyle>
-          <a:p>
-            <a:pPr>
-              <a:defRPr sz="900" b="0">
-                <a:solidFill>
-                  <a:srgbClr val="59656E"/>
-                </a:solidFill>
-              </a:defRPr>
-            </a:pPr>
-            <a:r>
-              <a:rPr sz="900" b="0">
-                <a:solidFill>
-                  <a:srgbClr val="59656E"/>
-                </a:solidFill>
-              </a:rPr>
-              <a:t>鎖頭銀行 M365 COPILOT 黑客松  •  2026.10  |  08</a:t>
-            </a:r>
-          </a:p>
-        </p:txBody>
-      </p:sp>
-      <p:sp>
-        <p:nvSpPr>
-          <p:cNvPr id="5" name="矩形 4">
-            <a:extLst>
-              <a:ext uri="{FF2B5EF4-FFF2-40B4-BE49-F238E27FC236}">
-                <a16:creationId xmlns:a16="http://schemas.microsoft.com/office/drawing/2014/main" id="{1C132881-5312-4B9D-A4BD-54277E832D04}"/>
-              </a:ext>
-            </a:extLst>
-          </p:cNvPr>
-          <p:cNvSpPr>
-            <a:spLocks noGrp="1"/>
-          </p:cNvSpPr>
-          <p:nvPr/>
-        </p:nvSpPr>
-        <p:spPr>
-          <a:xfrm>
-            <a:off x="685800" y="1676400"/>
-            <a:ext cx="10572750" cy="342900"/>
-          </a:xfrm>
-          <a:prstGeom prst="rect">
-            <a:avLst/>
-          </a:prstGeom>
-          <a:noFill/>
-          <a:ln w="0">
-            <a:noFill/>
-            <a:prstDash val="solid"/>
-          </a:ln>
-        </p:spPr>
-        <p:txBody>
-          <a:bodyPr/>
-          <a:lstStyle>
-            <a:defPPr>
-              <a:defRPr sz="1800" b="1">
-                <a:solidFill>
-                  <a:srgbClr val="202A33"/>
-                </a:solidFill>
-              </a:defRPr>
-            </a:defPPr>
-            <a:lvl1pPr>
-              <a:defRPr sz="1800" b="1">
-                <a:solidFill>
-                  <a:srgbClr val="202A33"/>
-                </a:solidFill>
-              </a:defRPr>
-            </a:lvl1pPr>
-            <a:lvl2pPr>
-              <a:defRPr sz="1800" b="1">
-                <a:solidFill>
-                  <a:srgbClr val="202A33"/>
-                </a:solidFill>
-              </a:defRPr>
-            </a:lvl2pPr>
-            <a:lvl3pPr>
-              <a:defRPr sz="1800" b="1">
-                <a:solidFill>
-                  <a:srgbClr val="202A33"/>
-                </a:solidFill>
-              </a:defRPr>
-            </a:lvl3pPr>
-            <a:lvl4pPr>
-              <a:defRPr sz="1800" b="1">
-                <a:solidFill>
-                  <a:srgbClr val="202A33"/>
-                </a:solidFill>
-              </a:defRPr>
-            </a:lvl4pPr>
-            <a:lvl5pPr>
-              <a:defRPr sz="1800" b="1">
-                <a:solidFill>
-                  <a:srgbClr val="202A33"/>
-                </a:solidFill>
-              </a:defRPr>
-            </a:lvl5pPr>
-            <a:lvl6pPr>
-              <a:defRPr sz="1800" b="1">
-                <a:solidFill>
-                  <a:srgbClr val="202A33"/>
-                </a:solidFill>
-              </a:defRPr>
-            </a:lvl6pPr>
-            <a:lvl7pPr>
-              <a:defRPr sz="1800" b="1">
-                <a:solidFill>
-                  <a:srgbClr val="202A33"/>
-                </a:solidFill>
-              </a:defRPr>
-            </a:lvl7pPr>
-            <a:lvl8pPr>
-              <a:defRPr sz="1800" b="1">
-                <a:solidFill>
-                  <a:srgbClr val="202A33"/>
-                </a:solidFill>
-              </a:defRPr>
-            </a:lvl8pPr>
-            <a:lvl9pPr>
-              <a:defRPr sz="1800" b="1">
-                <a:solidFill>
-                  <a:srgbClr val="202A33"/>
-                </a:solidFill>
-              </a:defRPr>
-            </a:lvl9pPr>
-          </a:lstStyle>
-          <a:p>
-            <a:pPr>
-              <a:defRPr sz="1800" b="1">
-                <a:solidFill>
-                  <a:srgbClr val="202A33"/>
-                </a:solidFill>
-              </a:defRPr>
-            </a:pPr>
-            <a:r>
-              <a:rPr sz="1800" b="1">
-                <a:solidFill>
-                  <a:srgbClr val="202A33"/>
-                </a:solidFill>
-              </a:rPr>
-              <a:t>每項工作各記錄 3 組人工與 SPA 秒數</a:t>
-            </a:r>
-          </a:p>
-        </p:txBody>
-      </p:sp>
-      <p:sp>
-        <p:nvSpPr>
-          <p:cNvPr id="6" name="矩形 5">
-            <a:extLst>
-              <a:ext uri="{FF2B5EF4-FFF2-40B4-BE49-F238E27FC236}">
-                <a16:creationId xmlns:a16="http://schemas.microsoft.com/office/drawing/2014/main" id="{B6CE4738-1D56-48F4-B270-F48312FCB1A1}"/>
-              </a:ext>
-            </a:extLst>
-          </p:cNvPr>
-          <p:cNvSpPr>
-            <a:spLocks noGrp="1"/>
-          </p:cNvSpPr>
-          <p:nvPr/>
-        </p:nvSpPr>
-        <p:spPr>
-          <a:xfrm>
-            <a:off x="876300" y="2400300"/>
-            <a:ext cx="3524250" cy="285750"/>
-          </a:xfrm>
-          <a:prstGeom prst="rect">
-            <a:avLst/>
-          </a:prstGeom>
-          <a:noFill/>
-          <a:ln w="0">
-            <a:noFill/>
-            <a:prstDash val="solid"/>
-          </a:ln>
-        </p:spPr>
-        <p:txBody>
-          <a:bodyPr/>
-          <a:lstStyle>
-            <a:defPPr>
-              <a:defRPr sz="1350" b="1">
-                <a:solidFill>
-                  <a:srgbClr val="59656E"/>
-                </a:solidFill>
-              </a:defRPr>
-            </a:defPPr>
-            <a:lvl1pPr>
-              <a:defRPr sz="1350" b="1">
-                <a:solidFill>
-                  <a:srgbClr val="59656E"/>
-                </a:solidFill>
-              </a:defRPr>
-            </a:lvl1pPr>
-            <a:lvl2pPr>
-              <a:defRPr sz="1350" b="1">
-                <a:solidFill>
-                  <a:srgbClr val="59656E"/>
-                </a:solidFill>
-              </a:defRPr>
-            </a:lvl2pPr>
-            <a:lvl3pPr>
-              <a:defRPr sz="1350" b="1">
-                <a:solidFill>
-                  <a:srgbClr val="59656E"/>
-                </a:solidFill>
-              </a:defRPr>
-            </a:lvl3pPr>
-            <a:lvl4pPr>
-              <a:defRPr sz="1350" b="1">
-                <a:solidFill>
-                  <a:srgbClr val="59656E"/>
-                </a:solidFill>
-              </a:defRPr>
-            </a:lvl4pPr>
-            <a:lvl5pPr>
-              <a:defRPr sz="1350" b="1">
-                <a:solidFill>
-                  <a:srgbClr val="59656E"/>
-                </a:solidFill>
-              </a:defRPr>
-            </a:lvl5pPr>
-            <a:lvl6pPr>
-              <a:defRPr sz="1350" b="1">
-                <a:solidFill>
-                  <a:srgbClr val="59656E"/>
-                </a:solidFill>
-              </a:defRPr>
-            </a:lvl6pPr>
-            <a:lvl7pPr>
-              <a:defRPr sz="1350" b="1">
-                <a:solidFill>
-                  <a:srgbClr val="59656E"/>
-                </a:solidFill>
-              </a:defRPr>
-            </a:lvl7pPr>
-            <a:lvl8pPr>
-              <a:defRPr sz="1350" b="1">
-                <a:solidFill>
-                  <a:srgbClr val="59656E"/>
-                </a:solidFill>
-              </a:defRPr>
-            </a:lvl8pPr>
-            <a:lvl9pPr>
-              <a:defRPr sz="1350" b="1">
-                <a:solidFill>
-                  <a:srgbClr val="59656E"/>
-                </a:solidFill>
-              </a:defRPr>
-            </a:lvl9pPr>
-          </a:lstStyle>
-          <a:p>
-            <a:pPr>
-              <a:defRPr sz="1350" b="1">
-                <a:solidFill>
-                  <a:srgbClr val="59656E"/>
-                </a:solidFill>
-              </a:defRPr>
-            </a:pPr>
-            <a:r>
-              <a:rPr sz="1350" b="1">
-                <a:solidFill>
-                  <a:srgbClr val="59656E"/>
-                </a:solidFill>
-              </a:rPr>
-              <a:t>人工平均秒數</a:t>
-            </a:r>
-          </a:p>
-        </p:txBody>
-      </p:sp>
-      <p:sp>
-        <p:nvSpPr>
-          <p:cNvPr id="7" name="矩形 6">
-            <a:extLst>
-              <a:ext uri="{FF2B5EF4-FFF2-40B4-BE49-F238E27FC236}">
-                <a16:creationId xmlns:a16="http://schemas.microsoft.com/office/drawing/2014/main" id="{288679A5-E97A-43CC-B294-15684B247AE6}"/>
-              </a:ext>
-            </a:extLst>
-          </p:cNvPr>
-          <p:cNvSpPr>
-            <a:spLocks noGrp="1"/>
-          </p:cNvSpPr>
-          <p:nvPr/>
-        </p:nvSpPr>
-        <p:spPr>
-          <a:xfrm>
-            <a:off x="4619625" y="2400300"/>
-            <a:ext cx="3524250" cy="285750"/>
-          </a:xfrm>
-          <a:prstGeom prst="rect">
-            <a:avLst/>
-          </a:prstGeom>
-          <a:noFill/>
-          <a:ln w="0">
-            <a:noFill/>
-            <a:prstDash val="solid"/>
-          </a:ln>
-        </p:spPr>
-        <p:txBody>
-          <a:bodyPr/>
-          <a:lstStyle>
-            <a:defPPr>
-              <a:defRPr sz="1350" b="1">
-                <a:solidFill>
-                  <a:srgbClr val="59656E"/>
-                </a:solidFill>
-              </a:defRPr>
-            </a:defPPr>
-            <a:lvl1pPr>
-              <a:defRPr sz="1350" b="1">
-                <a:solidFill>
-                  <a:srgbClr val="59656E"/>
-                </a:solidFill>
-              </a:defRPr>
-            </a:lvl1pPr>
-            <a:lvl2pPr>
-              <a:defRPr sz="1350" b="1">
-                <a:solidFill>
-                  <a:srgbClr val="59656E"/>
-                </a:solidFill>
-              </a:defRPr>
-            </a:lvl2pPr>
-            <a:lvl3pPr>
-              <a:defRPr sz="1350" b="1">
-                <a:solidFill>
-                  <a:srgbClr val="59656E"/>
-                </a:solidFill>
-              </a:defRPr>
-            </a:lvl3pPr>
-            <a:lvl4pPr>
-              <a:defRPr sz="1350" b="1">
-                <a:solidFill>
-                  <a:srgbClr val="59656E"/>
-                </a:solidFill>
-              </a:defRPr>
-            </a:lvl4pPr>
-            <a:lvl5pPr>
-              <a:defRPr sz="1350" b="1">
-                <a:solidFill>
-                  <a:srgbClr val="59656E"/>
-                </a:solidFill>
-              </a:defRPr>
-            </a:lvl5pPr>
-            <a:lvl6pPr>
-              <a:defRPr sz="1350" b="1">
-                <a:solidFill>
-                  <a:srgbClr val="59656E"/>
-                </a:solidFill>
-              </a:defRPr>
-            </a:lvl6pPr>
-            <a:lvl7pPr>
-              <a:defRPr sz="1350" b="1">
-                <a:solidFill>
-                  <a:srgbClr val="59656E"/>
-                </a:solidFill>
-              </a:defRPr>
-            </a:lvl7pPr>
-            <a:lvl8pPr>
-              <a:defRPr sz="1350" b="1">
-                <a:solidFill>
-                  <a:srgbClr val="59656E"/>
-                </a:solidFill>
-              </a:defRPr>
-            </a:lvl8pPr>
-            <a:lvl9pPr>
-              <a:defRPr sz="1350" b="1">
-                <a:solidFill>
-                  <a:srgbClr val="59656E"/>
-                </a:solidFill>
-              </a:defRPr>
-            </a:lvl9pPr>
-          </a:lstStyle>
-          <a:p>
-            <a:pPr>
-              <a:defRPr sz="1350" b="1">
-                <a:solidFill>
-                  <a:srgbClr val="59656E"/>
-                </a:solidFill>
-              </a:defRPr>
-            </a:pPr>
-            <a:r>
-              <a:rPr sz="1350" b="1">
-                <a:solidFill>
-                  <a:srgbClr val="59656E"/>
-                </a:solidFill>
-              </a:rPr>
-              <a:t>原型平均秒數</a:t>
-            </a:r>
-          </a:p>
-        </p:txBody>
-      </p:sp>
-      <p:sp>
-        <p:nvSpPr>
-          <p:cNvPr id="8" name="矩形 7">
-            <a:extLst>
-              <a:ext uri="{FF2B5EF4-FFF2-40B4-BE49-F238E27FC236}">
-                <a16:creationId xmlns:a16="http://schemas.microsoft.com/office/drawing/2014/main" id="{001955A8-D31D-44F0-A45D-B529F2C353C2}"/>
-              </a:ext>
-            </a:extLst>
-          </p:cNvPr>
-          <p:cNvSpPr>
-            <a:spLocks noGrp="1"/>
-          </p:cNvSpPr>
-          <p:nvPr/>
-        </p:nvSpPr>
-        <p:spPr>
-          <a:xfrm>
-            <a:off x="8458200" y="2400300"/>
-            <a:ext cx="2857500" cy="285750"/>
-          </a:xfrm>
-          <a:prstGeom prst="rect">
-            <a:avLst/>
-          </a:prstGeom>
-          <a:noFill/>
-          <a:ln w="0">
-            <a:noFill/>
-            <a:prstDash val="solid"/>
-          </a:ln>
-        </p:spPr>
-        <p:txBody>
-          <a:bodyPr/>
-          <a:lstStyle>
-            <a:defPPr>
-              <a:defRPr sz="1350" b="1">
-                <a:solidFill>
-                  <a:srgbClr val="59656E"/>
-                </a:solidFill>
-              </a:defRPr>
-            </a:defPPr>
-            <a:lvl1pPr>
-              <a:defRPr sz="1350" b="1">
-                <a:solidFill>
-                  <a:srgbClr val="59656E"/>
-                </a:solidFill>
-              </a:defRPr>
-            </a:lvl1pPr>
-            <a:lvl2pPr>
-              <a:defRPr sz="1350" b="1">
-                <a:solidFill>
-                  <a:srgbClr val="59656E"/>
-                </a:solidFill>
-              </a:defRPr>
-            </a:lvl2pPr>
-            <a:lvl3pPr>
-              <a:defRPr sz="1350" b="1">
-                <a:solidFill>
-                  <a:srgbClr val="59656E"/>
-                </a:solidFill>
-              </a:defRPr>
-            </a:lvl3pPr>
-            <a:lvl4pPr>
-              <a:defRPr sz="1350" b="1">
-                <a:solidFill>
-                  <a:srgbClr val="59656E"/>
-                </a:solidFill>
-              </a:defRPr>
-            </a:lvl4pPr>
-            <a:lvl5pPr>
-              <a:defRPr sz="1350" b="1">
-                <a:solidFill>
-                  <a:srgbClr val="59656E"/>
-                </a:solidFill>
-              </a:defRPr>
-            </a:lvl5pPr>
-            <a:lvl6pPr>
-              <a:defRPr sz="1350" b="1">
-                <a:solidFill>
-                  <a:srgbClr val="59656E"/>
-                </a:solidFill>
-              </a:defRPr>
-            </a:lvl6pPr>
-            <a:lvl7pPr>
-              <a:defRPr sz="1350" b="1">
-                <a:solidFill>
-                  <a:srgbClr val="59656E"/>
-                </a:solidFill>
-              </a:defRPr>
-            </a:lvl7pPr>
-            <a:lvl8pPr>
-              <a:defRPr sz="1350" b="1">
-                <a:solidFill>
-                  <a:srgbClr val="59656E"/>
-                </a:solidFill>
-              </a:defRPr>
-            </a:lvl8pPr>
-            <a:lvl9pPr>
-              <a:defRPr sz="1350" b="1">
-                <a:solidFill>
-                  <a:srgbClr val="59656E"/>
-                </a:solidFill>
-              </a:defRPr>
-            </a:lvl9pPr>
-          </a:lstStyle>
-          <a:p>
-            <a:pPr>
-              <a:defRPr sz="1350" b="1">
-                <a:solidFill>
-                  <a:srgbClr val="59656E"/>
-                </a:solidFill>
-              </a:defRPr>
-            </a:pPr>
-            <a:r>
-              <a:rPr sz="1350" b="1">
-                <a:solidFill>
-                  <a:srgbClr val="59656E"/>
-                </a:solidFill>
-              </a:rPr>
-              <a:t>改善率</a:t>
-            </a:r>
-          </a:p>
-        </p:txBody>
-      </p:sp>
-      <p:sp>
-        <p:nvSpPr>
-          <p:cNvPr id="9" name="矩形 8">
-            <a:extLst>
-              <a:ext uri="{FF2B5EF4-FFF2-40B4-BE49-F238E27FC236}">
-                <a16:creationId xmlns:a16="http://schemas.microsoft.com/office/drawing/2014/main" id="{97AF95EF-2BC1-4FBA-B5F5-1AD27A686648}"/>
-              </a:ext>
-            </a:extLst>
-          </p:cNvPr>
-          <p:cNvSpPr>
-            <a:spLocks noGrp="1"/>
-          </p:cNvSpPr>
-          <p:nvPr/>
-        </p:nvSpPr>
-        <p:spPr>
-          <a:xfrm>
-            <a:off x="876300" y="2924175"/>
-            <a:ext cx="3143250" cy="38100"/>
-          </a:xfrm>
-          <a:prstGeom prst="rect">
-            <a:avLst/>
-          </a:prstGeom>
-          <a:solidFill>
-            <a:srgbClr val="D8E0E6"/>
-          </a:solidFill>
-          <a:ln w="0">
-            <a:noFill/>
-            <a:prstDash val="solid"/>
-          </a:ln>
-        </p:spPr>
-      </p:sp>
-      <p:sp>
-        <p:nvSpPr>
-          <p:cNvPr id="10" name="矩形 9">
-            <a:extLst>
-              <a:ext uri="{FF2B5EF4-FFF2-40B4-BE49-F238E27FC236}">
-                <a16:creationId xmlns:a16="http://schemas.microsoft.com/office/drawing/2014/main" id="{576F70E0-20FD-4C9D-8438-BCAEA2977BDA}"/>
-              </a:ext>
-            </a:extLst>
-          </p:cNvPr>
-          <p:cNvSpPr>
-            <a:spLocks noGrp="1"/>
-          </p:cNvSpPr>
-          <p:nvPr/>
-        </p:nvSpPr>
-        <p:spPr>
-          <a:xfrm>
-            <a:off x="4191000" y="2743200"/>
-            <a:ext cx="438150" cy="361950"/>
-          </a:xfrm>
-          <a:prstGeom prst="rect">
-            <a:avLst/>
-          </a:prstGeom>
-          <a:noFill/>
-          <a:ln w="0">
-            <a:noFill/>
-            <a:prstDash val="solid"/>
-          </a:ln>
-        </p:spPr>
-        <p:txBody>
-          <a:bodyPr/>
-          <a:lstStyle>
-            <a:defPPr>
-              <a:defRPr sz="2100" b="1">
-                <a:solidFill>
-                  <a:srgbClr val="365A69"/>
-                </a:solidFill>
-              </a:defRPr>
-            </a:defPPr>
-            <a:lvl1pPr>
-              <a:defRPr sz="2100" b="1">
-                <a:solidFill>
-                  <a:srgbClr val="365A69"/>
-                </a:solidFill>
-              </a:defRPr>
-            </a:lvl1pPr>
-            <a:lvl2pPr>
-              <a:defRPr sz="2100" b="1">
-                <a:solidFill>
-                  <a:srgbClr val="365A69"/>
-                </a:solidFill>
-              </a:defRPr>
-            </a:lvl2pPr>
-            <a:lvl3pPr>
-              <a:defRPr sz="2100" b="1">
-                <a:solidFill>
-                  <a:srgbClr val="365A69"/>
-                </a:solidFill>
-              </a:defRPr>
-            </a:lvl3pPr>
-            <a:lvl4pPr>
-              <a:defRPr sz="2100" b="1">
-                <a:solidFill>
-                  <a:srgbClr val="365A69"/>
-                </a:solidFill>
-              </a:defRPr>
-            </a:lvl4pPr>
-            <a:lvl5pPr>
-              <a:defRPr sz="2100" b="1">
-                <a:solidFill>
-                  <a:srgbClr val="365A69"/>
-                </a:solidFill>
-              </a:defRPr>
-            </a:lvl5pPr>
-            <a:lvl6pPr>
-              <a:defRPr sz="2100" b="1">
-                <a:solidFill>
-                  <a:srgbClr val="365A69"/>
-                </a:solidFill>
-              </a:defRPr>
-            </a:lvl6pPr>
-            <a:lvl7pPr>
-              <a:defRPr sz="2100" b="1">
-                <a:solidFill>
-                  <a:srgbClr val="365A69"/>
-                </a:solidFill>
-              </a:defRPr>
-            </a:lvl7pPr>
-            <a:lvl8pPr>
-              <a:defRPr sz="2100" b="1">
-                <a:solidFill>
-                  <a:srgbClr val="365A69"/>
-                </a:solidFill>
-              </a:defRPr>
-            </a:lvl8pPr>
-            <a:lvl9pPr>
-              <a:defRPr sz="2100" b="1">
-                <a:solidFill>
-                  <a:srgbClr val="365A69"/>
-                </a:solidFill>
-              </a:defRPr>
-            </a:lvl9pPr>
-          </a:lstStyle>
-          <a:p>
-            <a:pPr>
-              <a:defRPr sz="2100" b="1">
-                <a:solidFill>
-                  <a:srgbClr val="365A69"/>
-                </a:solidFill>
-              </a:defRPr>
-            </a:pPr>
-            <a:r>
-              <a:rPr sz="2100" b="1">
-                <a:solidFill>
-                  <a:srgbClr val="365A69"/>
-                </a:solidFill>
-              </a:rPr>
-              <a:t>→</a:t>
-            </a:r>
-          </a:p>
-        </p:txBody>
-      </p:sp>
-      <p:sp>
-        <p:nvSpPr>
-          <p:cNvPr id="11" name="矩形 10">
-            <a:extLst>
-              <a:ext uri="{FF2B5EF4-FFF2-40B4-BE49-F238E27FC236}">
-                <a16:creationId xmlns:a16="http://schemas.microsoft.com/office/drawing/2014/main" id="{CB0E1280-E9B2-4109-AEFE-FD1D3DCD461E}"/>
-              </a:ext>
-            </a:extLst>
-          </p:cNvPr>
-          <p:cNvSpPr>
-            <a:spLocks noGrp="1"/>
-          </p:cNvSpPr>
-          <p:nvPr/>
-        </p:nvSpPr>
-        <p:spPr>
-          <a:xfrm>
-            <a:off x="4762500" y="2924175"/>
-            <a:ext cx="2857500" cy="38100"/>
-          </a:xfrm>
-          <a:prstGeom prst="rect">
-            <a:avLst/>
-          </a:prstGeom>
-          <a:solidFill>
-            <a:srgbClr val="70B7D5"/>
-          </a:solidFill>
-          <a:ln w="0">
-            <a:noFill/>
-            <a:prstDash val="solid"/>
-          </a:ln>
-        </p:spPr>
-      </p:sp>
-      <p:sp>
-        <p:nvSpPr>
-          <p:cNvPr id="12" name="矩形 11">
-            <a:extLst>
-              <a:ext uri="{FF2B5EF4-FFF2-40B4-BE49-F238E27FC236}">
-                <a16:creationId xmlns:a16="http://schemas.microsoft.com/office/drawing/2014/main" id="{CD458A46-3E8F-4AC7-856A-66CE74CDFC9A}"/>
-              </a:ext>
-            </a:extLst>
-          </p:cNvPr>
-          <p:cNvSpPr>
-            <a:spLocks noGrp="1"/>
-          </p:cNvSpPr>
-          <p:nvPr/>
-        </p:nvSpPr>
-        <p:spPr>
-          <a:xfrm>
-            <a:off x="7848600" y="2743200"/>
-            <a:ext cx="438150" cy="361950"/>
-          </a:xfrm>
-          <a:prstGeom prst="rect">
-            <a:avLst/>
-          </a:prstGeom>
-          <a:noFill/>
-          <a:ln w="0">
-            <a:noFill/>
-            <a:prstDash val="solid"/>
-          </a:ln>
-        </p:spPr>
-        <p:txBody>
-          <a:bodyPr/>
-          <a:lstStyle>
-            <a:defPPr>
-              <a:defRPr sz="2100" b="1">
-                <a:solidFill>
-                  <a:srgbClr val="365A69"/>
-                </a:solidFill>
-              </a:defRPr>
-            </a:defPPr>
-            <a:lvl1pPr>
-              <a:defRPr sz="2100" b="1">
-                <a:solidFill>
-                  <a:srgbClr val="365A69"/>
-                </a:solidFill>
-              </a:defRPr>
-            </a:lvl1pPr>
-            <a:lvl2pPr>
-              <a:defRPr sz="2100" b="1">
-                <a:solidFill>
-                  <a:srgbClr val="365A69"/>
-                </a:solidFill>
-              </a:defRPr>
-            </a:lvl2pPr>
-            <a:lvl3pPr>
-              <a:defRPr sz="2100" b="1">
-                <a:solidFill>
-                  <a:srgbClr val="365A69"/>
-                </a:solidFill>
-              </a:defRPr>
-            </a:lvl3pPr>
-            <a:lvl4pPr>
-              <a:defRPr sz="2100" b="1">
-                <a:solidFill>
-                  <a:srgbClr val="365A69"/>
-                </a:solidFill>
-              </a:defRPr>
-            </a:lvl4pPr>
-            <a:lvl5pPr>
-              <a:defRPr sz="2100" b="1">
-                <a:solidFill>
-                  <a:srgbClr val="365A69"/>
-                </a:solidFill>
-              </a:defRPr>
-            </a:lvl5pPr>
-            <a:lvl6pPr>
-              <a:defRPr sz="2100" b="1">
-                <a:solidFill>
-                  <a:srgbClr val="365A69"/>
-                </a:solidFill>
-              </a:defRPr>
-            </a:lvl6pPr>
-            <a:lvl7pPr>
-              <a:defRPr sz="2100" b="1">
-                <a:solidFill>
-                  <a:srgbClr val="365A69"/>
-                </a:solidFill>
-              </a:defRPr>
-            </a:lvl7pPr>
-            <a:lvl8pPr>
-              <a:defRPr sz="2100" b="1">
-                <a:solidFill>
-                  <a:srgbClr val="365A69"/>
-                </a:solidFill>
-              </a:defRPr>
-            </a:lvl8pPr>
-            <a:lvl9pPr>
-              <a:defRPr sz="2100" b="1">
-                <a:solidFill>
-                  <a:srgbClr val="365A69"/>
-                </a:solidFill>
-              </a:defRPr>
-            </a:lvl9pPr>
-          </a:lstStyle>
-          <a:p>
-            <a:pPr>
-              <a:defRPr sz="2100" b="1">
-                <a:solidFill>
-                  <a:srgbClr val="365A69"/>
-                </a:solidFill>
-              </a:defRPr>
-            </a:pPr>
-            <a:r>
-              <a:rPr sz="2100" b="1">
-                <a:solidFill>
-                  <a:srgbClr val="365A69"/>
-                </a:solidFill>
-              </a:rPr>
-              <a:t>→</a:t>
-            </a:r>
-          </a:p>
-        </p:txBody>
-      </p:sp>
-      <p:sp>
-        <p:nvSpPr>
-          <p:cNvPr id="13" name="矩形 12">
-            <a:extLst>
-              <a:ext uri="{FF2B5EF4-FFF2-40B4-BE49-F238E27FC236}">
-                <a16:creationId xmlns:a16="http://schemas.microsoft.com/office/drawing/2014/main" id="{832ACD71-F4C8-48FF-AEBA-AEF12EB6776D}"/>
-              </a:ext>
-            </a:extLst>
-          </p:cNvPr>
-          <p:cNvSpPr>
-            <a:spLocks noGrp="1"/>
-          </p:cNvSpPr>
-          <p:nvPr/>
-        </p:nvSpPr>
-        <p:spPr>
-          <a:xfrm>
-            <a:off x="8429625" y="2781300"/>
-            <a:ext cx="3095625" cy="419100"/>
-          </a:xfrm>
-          <a:prstGeom prst="rect">
-            <a:avLst/>
-          </a:prstGeom>
-          <a:noFill/>
-          <a:ln w="0">
-            <a:noFill/>
-            <a:prstDash val="solid"/>
-          </a:ln>
-        </p:spPr>
-        <p:txBody>
-          <a:bodyPr/>
-          <a:lstStyle>
-            <a:defPPr>
-              <a:defRPr sz="1350" b="1">
-                <a:solidFill>
-                  <a:srgbClr val="365A69"/>
-                </a:solidFill>
-              </a:defRPr>
-            </a:defPPr>
-            <a:lvl1pPr>
-              <a:defRPr sz="1350" b="1">
-                <a:solidFill>
-                  <a:srgbClr val="365A69"/>
-                </a:solidFill>
-              </a:defRPr>
-            </a:lvl1pPr>
-            <a:lvl2pPr>
-              <a:defRPr sz="1350" b="1">
-                <a:solidFill>
-                  <a:srgbClr val="365A69"/>
-                </a:solidFill>
-              </a:defRPr>
-            </a:lvl2pPr>
-            <a:lvl3pPr>
-              <a:defRPr sz="1350" b="1">
-                <a:solidFill>
-                  <a:srgbClr val="365A69"/>
-                </a:solidFill>
-              </a:defRPr>
-            </a:lvl3pPr>
-            <a:lvl4pPr>
-              <a:defRPr sz="1350" b="1">
-                <a:solidFill>
-                  <a:srgbClr val="365A69"/>
-                </a:solidFill>
-              </a:defRPr>
-            </a:lvl4pPr>
-            <a:lvl5pPr>
-              <a:defRPr sz="1350" b="1">
-                <a:solidFill>
-                  <a:srgbClr val="365A69"/>
-                </a:solidFill>
-              </a:defRPr>
-            </a:lvl5pPr>
-            <a:lvl6pPr>
-              <a:defRPr sz="1350" b="1">
-                <a:solidFill>
-                  <a:srgbClr val="365A69"/>
-                </a:solidFill>
-              </a:defRPr>
-            </a:lvl6pPr>
-            <a:lvl7pPr>
-              <a:defRPr sz="1350" b="1">
-                <a:solidFill>
-                  <a:srgbClr val="365A69"/>
-                </a:solidFill>
-              </a:defRPr>
-            </a:lvl7pPr>
-            <a:lvl8pPr>
-              <a:defRPr sz="1350" b="1">
-                <a:solidFill>
-                  <a:srgbClr val="365A69"/>
-                </a:solidFill>
-              </a:defRPr>
-            </a:lvl8pPr>
-            <a:lvl9pPr>
-              <a:defRPr sz="1350" b="1">
-                <a:solidFill>
-                  <a:srgbClr val="365A69"/>
-                </a:solidFill>
-              </a:defRPr>
-            </a:lvl9pPr>
-          </a:lstStyle>
-          <a:p>
-            <a:pPr>
-              <a:defRPr sz="1350" b="1">
-                <a:solidFill>
-                  <a:srgbClr val="365A69"/>
-                </a:solidFill>
-              </a:defRPr>
-            </a:pPr>
-            <a:r>
-              <a:rPr sz="1350" b="1">
-                <a:solidFill>
-                  <a:srgbClr val="365A69"/>
-                </a:solidFill>
-              </a:rPr>
-              <a:t>(人工 − SPA) ÷ 人工</a:t>
-            </a:r>
-          </a:p>
-        </p:txBody>
-      </p:sp>
-      <p:sp>
-        <p:nvSpPr>
-          <p:cNvPr id="14" name="矩形 13">
-            <a:extLst>
-              <a:ext uri="{FF2B5EF4-FFF2-40B4-BE49-F238E27FC236}">
-                <a16:creationId xmlns:a16="http://schemas.microsoft.com/office/drawing/2014/main" id="{7C808235-7ADA-4135-AB75-066E1362583A}"/>
-              </a:ext>
-            </a:extLst>
-          </p:cNvPr>
-          <p:cNvSpPr>
-            <a:spLocks noGrp="1"/>
-          </p:cNvSpPr>
-          <p:nvPr/>
-        </p:nvSpPr>
-        <p:spPr>
-          <a:xfrm>
-            <a:off x="685800" y="3571875"/>
-            <a:ext cx="3333750" cy="285750"/>
-          </a:xfrm>
-          <a:prstGeom prst="rect">
-            <a:avLst/>
-          </a:prstGeom>
-          <a:noFill/>
-          <a:ln w="0">
-            <a:noFill/>
-            <a:prstDash val="solid"/>
-          </a:ln>
-        </p:spPr>
-        <p:txBody>
-          <a:bodyPr/>
-          <a:lstStyle>
-            <a:defPPr>
-              <a:defRPr sz="1650" b="1">
-                <a:solidFill>
-                  <a:srgbClr val="365A69"/>
-                </a:solidFill>
-              </a:defRPr>
-            </a:defPPr>
-            <a:lvl1pPr>
-              <a:defRPr sz="1650" b="1">
-                <a:solidFill>
-                  <a:srgbClr val="365A69"/>
-                </a:solidFill>
-              </a:defRPr>
-            </a:lvl1pPr>
-            <a:lvl2pPr>
-              <a:defRPr sz="1650" b="1">
-                <a:solidFill>
-                  <a:srgbClr val="365A69"/>
-                </a:solidFill>
-              </a:defRPr>
-            </a:lvl2pPr>
-            <a:lvl3pPr>
-              <a:defRPr sz="1650" b="1">
-                <a:solidFill>
-                  <a:srgbClr val="365A69"/>
-                </a:solidFill>
-              </a:defRPr>
-            </a:lvl3pPr>
-            <a:lvl4pPr>
-              <a:defRPr sz="1650" b="1">
-                <a:solidFill>
-                  <a:srgbClr val="365A69"/>
-                </a:solidFill>
-              </a:defRPr>
-            </a:lvl4pPr>
-            <a:lvl5pPr>
-              <a:defRPr sz="1650" b="1">
-                <a:solidFill>
-                  <a:srgbClr val="365A69"/>
-                </a:solidFill>
-              </a:defRPr>
-            </a:lvl5pPr>
-            <a:lvl6pPr>
-              <a:defRPr sz="1650" b="1">
-                <a:solidFill>
-                  <a:srgbClr val="365A69"/>
-                </a:solidFill>
-              </a:defRPr>
-            </a:lvl6pPr>
-            <a:lvl7pPr>
-              <a:defRPr sz="1650" b="1">
-                <a:solidFill>
-                  <a:srgbClr val="365A69"/>
-                </a:solidFill>
-              </a:defRPr>
-            </a:lvl7pPr>
-            <a:lvl8pPr>
-              <a:defRPr sz="1650" b="1">
-                <a:solidFill>
-                  <a:srgbClr val="365A69"/>
-                </a:solidFill>
-              </a:defRPr>
-            </a:lvl8pPr>
-            <a:lvl9pPr>
-              <a:defRPr sz="1650" b="1">
-                <a:solidFill>
-                  <a:srgbClr val="365A69"/>
-                </a:solidFill>
-              </a:defRPr>
-            </a:lvl9pPr>
-          </a:lstStyle>
-          <a:p>
-            <a:pPr>
-              <a:defRPr sz="1650" b="1">
-                <a:solidFill>
-                  <a:srgbClr val="365A69"/>
-                </a:solidFill>
-              </a:defRPr>
-            </a:pPr>
-            <a:r>
-              <a:rPr sz="1650" b="1">
-                <a:solidFill>
-                  <a:srgbClr val="365A69"/>
-                </a:solidFill>
-              </a:rPr>
-              <a:t>風險管理情境的五項工作</a:t>
-            </a:r>
-          </a:p>
-        </p:txBody>
-      </p:sp>
-      <p:sp>
-        <p:nvSpPr>
-          <p:cNvPr id="15" name="矩形 14">
-            <a:extLst>
-              <a:ext uri="{FF2B5EF4-FFF2-40B4-BE49-F238E27FC236}">
-                <a16:creationId xmlns:a16="http://schemas.microsoft.com/office/drawing/2014/main" id="{0EBB5D2F-635D-4090-ADC5-80E56FEF4F8C}"/>
-              </a:ext>
-            </a:extLst>
-          </p:cNvPr>
-          <p:cNvSpPr>
-            <a:spLocks noGrp="1"/>
-          </p:cNvSpPr>
-          <p:nvPr/>
-        </p:nvSpPr>
-        <p:spPr>
-          <a:xfrm>
-            <a:off x="685800" y="4029075"/>
-            <a:ext cx="10477500" cy="571500"/>
-          </a:xfrm>
-          <a:prstGeom prst="rect">
-            <a:avLst/>
-          </a:prstGeom>
-          <a:noFill/>
-          <a:ln w="0">
-            <a:noFill/>
-            <a:prstDash val="solid"/>
-          </a:ln>
-        </p:spPr>
-        <p:txBody>
-          <a:bodyPr/>
-          <a:lstStyle>
-            <a:defPPr>
-              <a:defRPr sz="1425" b="0">
-                <a:solidFill>
-                  <a:srgbClr val="25323C"/>
-                </a:solidFill>
-              </a:defRPr>
-            </a:defPPr>
-            <a:lvl1pPr>
-              <a:defRPr sz="1425" b="0">
-                <a:solidFill>
-                  <a:srgbClr val="25323C"/>
-                </a:solidFill>
-              </a:defRPr>
-            </a:lvl1pPr>
-            <a:lvl2pPr>
-              <a:defRPr sz="1425" b="0">
-                <a:solidFill>
-                  <a:srgbClr val="25323C"/>
-                </a:solidFill>
-              </a:defRPr>
-            </a:lvl2pPr>
-            <a:lvl3pPr>
-              <a:defRPr sz="1425" b="0">
-                <a:solidFill>
-                  <a:srgbClr val="25323C"/>
-                </a:solidFill>
-              </a:defRPr>
-            </a:lvl3pPr>
-            <a:lvl4pPr>
-              <a:defRPr sz="1425" b="0">
-                <a:solidFill>
-                  <a:srgbClr val="25323C"/>
-                </a:solidFill>
-              </a:defRPr>
-            </a:lvl4pPr>
-            <a:lvl5pPr>
-              <a:defRPr sz="1425" b="0">
-                <a:solidFill>
-                  <a:srgbClr val="25323C"/>
-                </a:solidFill>
-              </a:defRPr>
-            </a:lvl5pPr>
-            <a:lvl6pPr>
-              <a:defRPr sz="1425" b="0">
-                <a:solidFill>
-                  <a:srgbClr val="25323C"/>
-                </a:solidFill>
-              </a:defRPr>
-            </a:lvl6pPr>
-            <a:lvl7pPr>
-              <a:defRPr sz="1425" b="0">
-                <a:solidFill>
-                  <a:srgbClr val="25323C"/>
-                </a:solidFill>
-              </a:defRPr>
-            </a:lvl7pPr>
-            <a:lvl8pPr>
-              <a:defRPr sz="1425" b="0">
-                <a:solidFill>
-                  <a:srgbClr val="25323C"/>
-                </a:solidFill>
-              </a:defRPr>
-            </a:lvl8pPr>
-            <a:lvl9pPr>
-              <a:defRPr sz="1425" b="0">
-                <a:solidFill>
-                  <a:srgbClr val="25323C"/>
-                </a:solidFill>
-              </a:defRPr>
-            </a:lvl9pPr>
-          </a:lstStyle>
-          <a:p>
-            <a:pPr>
-              <a:defRPr sz="1425" b="0">
-                <a:solidFill>
-                  <a:srgbClr val="25323C"/>
-                </a:solidFill>
-              </a:defRPr>
-            </a:pPr>
-            <a:r>
-              <a:rPr sz="1425" b="0">
-                <a:solidFill>
-                  <a:srgbClr val="25323C"/>
-                </a:solidFill>
-              </a:rPr>
-              <a:t>SQL 差異比對  •  欄位血緣追蹤  •  資料品質稽核  •  個資清除  •  SQL 清冊</a:t>
-            </a:r>
-          </a:p>
-        </p:txBody>
-      </p:sp>
-      <p:sp>
-        <p:nvSpPr>
           <p:cNvPr id="16" name="矩形 15">
             <a:extLst>
               <a:ext uri="{FF2B5EF4-FFF2-40B4-BE49-F238E27FC236}">
@@ -22564,316 +21178,1738 @@
       </p:sp>
       <p:sp>
         <p:nvSpPr>
-          <p:cNvPr id="17" name="矩形 16">
+          <p:cNvPr id="20" name="文字方塊 19">
             <a:extLst>
               <a:ext uri="{FF2B5EF4-FFF2-40B4-BE49-F238E27FC236}">
-                <a16:creationId xmlns:a16="http://schemas.microsoft.com/office/drawing/2014/main" id="{91DCD038-A14C-4397-A1D1-FB2ED1029192}"/>
+                <a16:creationId xmlns:a16="http://schemas.microsoft.com/office/drawing/2014/main" id="{E5C395B8-E528-3017-ACD6-98613B201806}"/>
               </a:ext>
             </a:extLst>
           </p:cNvPr>
-          <p:cNvSpPr>
-            <a:spLocks noGrp="1"/>
-          </p:cNvSpPr>
+          <p:cNvSpPr txBox="1"/>
           <p:nvPr/>
         </p:nvSpPr>
         <p:spPr>
           <a:xfrm>
-            <a:off x="685800" y="5191125"/>
-            <a:ext cx="10477500" cy="457200"/>
+            <a:off x="749808" y="1664208"/>
+            <a:ext cx="10789920" cy="271869"/>
           </a:xfrm>
           <a:prstGeom prst="rect">
             <a:avLst/>
           </a:prstGeom>
           <a:noFill/>
-          <a:ln w="0">
+        </p:spPr>
+        <p:txBody>
+          <a:bodyPr vert="horz" lIns="38100" tIns="12700" rIns="38100" bIns="12700" rtlCol="0">
+            <a:spAutoFit/>
+          </a:bodyPr>
+          <a:lstStyle/>
+          <a:p>
+            <a:r>
+              <a:rPr lang="zh-TW" altLang="en-US" sz="1600" b="1">
+                <a:solidFill>
+                  <a:srgbClr val="365A69"/>
+                </a:solidFill>
+                <a:latin typeface="Microsoft JhengHei" panose="020B0604030504040204" pitchFamily="34" charset="-120"/>
+              </a:rPr>
+              <a:t>質化效益：影響證據可回查、解析警告可見，減少跨團隊重複核對負擔</a:t>
+            </a:r>
+          </a:p>
+        </p:txBody>
+      </p:sp>
+      <p:sp>
+        <p:nvSpPr>
+          <p:cNvPr id="21" name="矩形 20">
+            <a:extLst>
+              <a:ext uri="{FF2B5EF4-FFF2-40B4-BE49-F238E27FC236}">
+                <a16:creationId xmlns:a16="http://schemas.microsoft.com/office/drawing/2014/main" id="{DDE828F2-0CEA-69EB-26BC-97FE4460614D}"/>
+              </a:ext>
+            </a:extLst>
+          </p:cNvPr>
+          <p:cNvSpPr/>
+          <p:nvPr/>
+        </p:nvSpPr>
+        <p:spPr>
+          <a:xfrm>
+            <a:off x="749808" y="2084832"/>
+            <a:ext cx="10222992" cy="338328"/>
+          </a:xfrm>
+          <a:prstGeom prst="rect">
+            <a:avLst/>
+          </a:prstGeom>
+          <a:solidFill>
+            <a:srgbClr val="202A33"/>
+          </a:solidFill>
+          <a:ln w="19050">
             <a:noFill/>
             <a:prstDash val="solid"/>
           </a:ln>
+          <a:effectLst/>
+          <a:extLst>
+            <a:ext uri="{91240B29-F687-4F45-9708-019B960494DF}">
+              <a14:hiddenLine xmlns:a14="http://schemas.microsoft.com/office/drawing/2010/main" w="19050">
+                <a:solidFill>
+                  <a:schemeClr val="accent1">
+                    <a:shade val="15000"/>
+                  </a:schemeClr>
+                </a:solidFill>
+                <a:prstDash val="solid"/>
+              </a14:hiddenLine>
+            </a:ext>
+          </a:extLst>
+        </p:spPr>
+        <p:style>
+          <a:lnRef idx="2">
+            <a:schemeClr val="accent1">
+              <a:shade val="15000"/>
+            </a:schemeClr>
+          </a:lnRef>
+          <a:fillRef idx="1">
+            <a:schemeClr val="accent1"/>
+          </a:fillRef>
+          <a:effectRef idx="0">
+            <a:schemeClr val="accent1"/>
+          </a:effectRef>
+          <a:fontRef idx="minor">
+            <a:schemeClr val="lt1"/>
+          </a:fontRef>
+        </p:style>
+        <p:txBody>
+          <a:bodyPr rtlCol="0" anchor="ctr"/>
+          <a:lstStyle/>
+          <a:p>
+            <a:pPr algn="ctr"/>
+            <a:endParaRPr lang="zh-TW" altLang="en-US"/>
+          </a:p>
+        </p:txBody>
+      </p:sp>
+      <p:sp>
+        <p:nvSpPr>
+          <p:cNvPr id="22" name="文字方塊 21">
+            <a:extLst>
+              <a:ext uri="{FF2B5EF4-FFF2-40B4-BE49-F238E27FC236}">
+                <a16:creationId xmlns:a16="http://schemas.microsoft.com/office/drawing/2014/main" id="{9FC23017-615B-370F-D170-FC512EC125FC}"/>
+              </a:ext>
+            </a:extLst>
+          </p:cNvPr>
+          <p:cNvSpPr txBox="1"/>
+          <p:nvPr/>
+        </p:nvSpPr>
+        <p:spPr>
+          <a:xfrm>
+            <a:off x="749808" y="2093976"/>
+            <a:ext cx="1463040" cy="218008"/>
+          </a:xfrm>
+          <a:prstGeom prst="rect">
+            <a:avLst/>
+          </a:prstGeom>
+          <a:noFill/>
         </p:spPr>
         <p:txBody>
-          <a:bodyPr/>
-          <a:lstStyle>
-            <a:defPPr>
-              <a:defRPr sz="1500" b="1">
-                <a:solidFill>
-                  <a:srgbClr val="202A33"/>
-                </a:solidFill>
-              </a:defRPr>
-            </a:defPPr>
-            <a:lvl1pPr>
-              <a:defRPr sz="1500" b="1">
-                <a:solidFill>
-                  <a:srgbClr val="202A33"/>
-                </a:solidFill>
-              </a:defRPr>
-            </a:lvl1pPr>
-            <a:lvl2pPr>
-              <a:defRPr sz="1500" b="1">
-                <a:solidFill>
-                  <a:srgbClr val="202A33"/>
-                </a:solidFill>
-              </a:defRPr>
-            </a:lvl2pPr>
-            <a:lvl3pPr>
-              <a:defRPr sz="1500" b="1">
-                <a:solidFill>
-                  <a:srgbClr val="202A33"/>
-                </a:solidFill>
-              </a:defRPr>
-            </a:lvl3pPr>
-            <a:lvl4pPr>
-              <a:defRPr sz="1500" b="1">
-                <a:solidFill>
-                  <a:srgbClr val="202A33"/>
-                </a:solidFill>
-              </a:defRPr>
-            </a:lvl4pPr>
-            <a:lvl5pPr>
-              <a:defRPr sz="1500" b="1">
-                <a:solidFill>
-                  <a:srgbClr val="202A33"/>
-                </a:solidFill>
-              </a:defRPr>
-            </a:lvl5pPr>
-            <a:lvl6pPr>
-              <a:defRPr sz="1500" b="1">
-                <a:solidFill>
-                  <a:srgbClr val="202A33"/>
-                </a:solidFill>
-              </a:defRPr>
-            </a:lvl6pPr>
-            <a:lvl7pPr>
-              <a:defRPr sz="1500" b="1">
-                <a:solidFill>
-                  <a:srgbClr val="202A33"/>
-                </a:solidFill>
-              </a:defRPr>
-            </a:lvl7pPr>
-            <a:lvl8pPr>
-              <a:defRPr sz="1500" b="1">
-                <a:solidFill>
-                  <a:srgbClr val="202A33"/>
-                </a:solidFill>
-              </a:defRPr>
-            </a:lvl8pPr>
-            <a:lvl9pPr>
-              <a:defRPr sz="1500" b="1">
-                <a:solidFill>
-                  <a:srgbClr val="202A33"/>
-                </a:solidFill>
-              </a:defRPr>
-            </a:lvl9pPr>
-          </a:lstStyle>
+          <a:bodyPr vert="horz" lIns="38100" tIns="12700" rIns="38100" bIns="12700" rtlCol="0">
+            <a:spAutoFit/>
+          </a:bodyPr>
+          <a:lstStyle/>
           <a:p>
-            <a:pPr>
-              <a:defRPr sz="1500" b="1">
-                <a:solidFill>
-                  <a:srgbClr val="202A33"/>
-                </a:solidFill>
-              </a:defRPr>
-            </a:pPr>
+            <a:pPr algn="ctr"/>
             <a:r>
-              <a:rPr lang="en-US" altLang="zh-TW" sz="1500" b="1">
-                <a:solidFill>
-                  <a:srgbClr val="202A33"/>
-                </a:solidFill>
+              <a:rPr lang="zh-TW" altLang="en-US" sz="1250" b="1">
+                <a:solidFill>
+                  <a:srgbClr val="FFFFFF"/>
+                </a:solidFill>
+                <a:latin typeface="Microsoft JhengHei" panose="020B0604030504040204" pitchFamily="34" charset="-120"/>
               </a:rPr>
-              <a:t>Colab </a:t>
+              <a:t>情境</a:t>
+            </a:r>
+          </a:p>
+        </p:txBody>
+      </p:sp>
+      <p:sp>
+        <p:nvSpPr>
+          <p:cNvPr id="23" name="文字方塊 22">
+            <a:extLst>
+              <a:ext uri="{FF2B5EF4-FFF2-40B4-BE49-F238E27FC236}">
+                <a16:creationId xmlns:a16="http://schemas.microsoft.com/office/drawing/2014/main" id="{C8D4B3D4-040D-F510-03D0-9996922C17EE}"/>
+              </a:ext>
+            </a:extLst>
+          </p:cNvPr>
+          <p:cNvSpPr txBox="1"/>
+          <p:nvPr/>
+        </p:nvSpPr>
+        <p:spPr>
+          <a:xfrm>
+            <a:off x="2304288" y="2093976"/>
+            <a:ext cx="1645920" cy="218008"/>
+          </a:xfrm>
+          <a:prstGeom prst="rect">
+            <a:avLst/>
+          </a:prstGeom>
+          <a:noFill/>
+        </p:spPr>
+        <p:txBody>
+          <a:bodyPr vert="horz" lIns="38100" tIns="12700" rIns="38100" bIns="12700" rtlCol="0">
+            <a:spAutoFit/>
+          </a:bodyPr>
+          <a:lstStyle/>
+          <a:p>
+            <a:pPr algn="ctr"/>
+            <a:r>
+              <a:rPr lang="zh-TW" altLang="en-US" sz="1250" b="1">
+                <a:solidFill>
+                  <a:srgbClr val="FFFFFF"/>
+                </a:solidFill>
+                <a:latin typeface="Microsoft JhengHei" panose="020B0604030504040204" pitchFamily="34" charset="-120"/>
+              </a:rPr>
+              <a:t>年案件量</a:t>
+            </a:r>
+          </a:p>
+        </p:txBody>
+      </p:sp>
+      <p:sp>
+        <p:nvSpPr>
+          <p:cNvPr id="24" name="文字方塊 23">
+            <a:extLst>
+              <a:ext uri="{FF2B5EF4-FFF2-40B4-BE49-F238E27FC236}">
+                <a16:creationId xmlns:a16="http://schemas.microsoft.com/office/drawing/2014/main" id="{C7D7D4D3-71FB-CF3A-A332-A7CFE06F4819}"/>
+              </a:ext>
+            </a:extLst>
+          </p:cNvPr>
+          <p:cNvSpPr txBox="1"/>
+          <p:nvPr/>
+        </p:nvSpPr>
+        <p:spPr>
+          <a:xfrm>
+            <a:off x="4069080" y="2093976"/>
+            <a:ext cx="1965960" cy="218008"/>
+          </a:xfrm>
+          <a:prstGeom prst="rect">
+            <a:avLst/>
+          </a:prstGeom>
+          <a:noFill/>
+        </p:spPr>
+        <p:txBody>
+          <a:bodyPr vert="horz" lIns="38100" tIns="12700" rIns="38100" bIns="12700" rtlCol="0">
+            <a:spAutoFit/>
+          </a:bodyPr>
+          <a:lstStyle/>
+          <a:p>
+            <a:pPr algn="ctr"/>
+            <a:r>
+              <a:rPr lang="zh-TW" altLang="en-US" sz="1250" b="1">
+                <a:solidFill>
+                  <a:srgbClr val="FFFFFF"/>
+                </a:solidFill>
+                <a:latin typeface="Microsoft JhengHei" panose="020B0604030504040204" pitchFamily="34" charset="-120"/>
+              </a:rPr>
+              <a:t>每案節省假設</a:t>
+            </a:r>
+          </a:p>
+        </p:txBody>
+      </p:sp>
+      <p:sp>
+        <p:nvSpPr>
+          <p:cNvPr id="25" name="文字方塊 24">
+            <a:extLst>
+              <a:ext uri="{FF2B5EF4-FFF2-40B4-BE49-F238E27FC236}">
+                <a16:creationId xmlns:a16="http://schemas.microsoft.com/office/drawing/2014/main" id="{222F8E48-DDF3-9DBA-E04D-9B667B1D176F}"/>
+              </a:ext>
+            </a:extLst>
+          </p:cNvPr>
+          <p:cNvSpPr txBox="1"/>
+          <p:nvPr/>
+        </p:nvSpPr>
+        <p:spPr>
+          <a:xfrm>
+            <a:off x="6126480" y="2093976"/>
+            <a:ext cx="1920240" cy="218008"/>
+          </a:xfrm>
+          <a:prstGeom prst="rect">
+            <a:avLst/>
+          </a:prstGeom>
+          <a:noFill/>
+        </p:spPr>
+        <p:txBody>
+          <a:bodyPr vert="horz" lIns="38100" tIns="12700" rIns="38100" bIns="12700" rtlCol="0">
+            <a:spAutoFit/>
+          </a:bodyPr>
+          <a:lstStyle/>
+          <a:p>
+            <a:pPr algn="ctr"/>
+            <a:r>
+              <a:rPr lang="zh-TW" altLang="en-US" sz="1250" b="1">
+                <a:solidFill>
+                  <a:srgbClr val="FFFFFF"/>
+                </a:solidFill>
+                <a:latin typeface="Microsoft JhengHei" panose="020B0604030504040204" pitchFamily="34" charset="-120"/>
+              </a:rPr>
+              <a:t>年回收工時</a:t>
+            </a:r>
+          </a:p>
+        </p:txBody>
+      </p:sp>
+      <p:sp>
+        <p:nvSpPr>
+          <p:cNvPr id="26" name="文字方塊 25">
+            <a:extLst>
+              <a:ext uri="{FF2B5EF4-FFF2-40B4-BE49-F238E27FC236}">
+                <a16:creationId xmlns:a16="http://schemas.microsoft.com/office/drawing/2014/main" id="{5BE7071C-3958-9264-1BF8-23278409A221}"/>
+              </a:ext>
+            </a:extLst>
+          </p:cNvPr>
+          <p:cNvSpPr txBox="1"/>
+          <p:nvPr/>
+        </p:nvSpPr>
+        <p:spPr>
+          <a:xfrm>
+            <a:off x="8138160" y="2093976"/>
+            <a:ext cx="2834640" cy="218008"/>
+          </a:xfrm>
+          <a:prstGeom prst="rect">
+            <a:avLst/>
+          </a:prstGeom>
+          <a:noFill/>
+        </p:spPr>
+        <p:txBody>
+          <a:bodyPr vert="horz" lIns="38100" tIns="12700" rIns="38100" bIns="12700" rtlCol="0">
+            <a:spAutoFit/>
+          </a:bodyPr>
+          <a:lstStyle/>
+          <a:p>
+            <a:pPr algn="ctr"/>
+            <a:r>
+              <a:rPr lang="zh-TW" altLang="en-US" sz="1250" b="1">
+                <a:solidFill>
+                  <a:srgbClr val="FFFFFF"/>
+                </a:solidFill>
+                <a:latin typeface="Microsoft JhengHei" panose="020B0604030504040204" pitchFamily="34" charset="-120"/>
+              </a:rPr>
+              <a:t>年工時價值</a:t>
+            </a:r>
+          </a:p>
+        </p:txBody>
+      </p:sp>
+      <p:sp>
+        <p:nvSpPr>
+          <p:cNvPr id="27" name="矩形 26">
+            <a:extLst>
+              <a:ext uri="{FF2B5EF4-FFF2-40B4-BE49-F238E27FC236}">
+                <a16:creationId xmlns:a16="http://schemas.microsoft.com/office/drawing/2014/main" id="{725DDBCA-68F9-A9BB-65BC-7C8CEDF50FAC}"/>
+              </a:ext>
+            </a:extLst>
+          </p:cNvPr>
+          <p:cNvSpPr/>
+          <p:nvPr/>
+        </p:nvSpPr>
+        <p:spPr>
+          <a:xfrm>
+            <a:off x="749808" y="2450592"/>
+            <a:ext cx="10222992" cy="356616"/>
+          </a:xfrm>
+          <a:prstGeom prst="rect">
+            <a:avLst/>
+          </a:prstGeom>
+          <a:solidFill>
+            <a:srgbClr val="FFFFFF"/>
+          </a:solidFill>
+          <a:ln w="19050">
+            <a:noFill/>
+            <a:prstDash val="solid"/>
+          </a:ln>
+          <a:effectLst/>
+          <a:extLst>
+            <a:ext uri="{91240B29-F687-4F45-9708-019B960494DF}">
+              <a14:hiddenLine xmlns:a14="http://schemas.microsoft.com/office/drawing/2010/main" w="19050">
+                <a:solidFill>
+                  <a:schemeClr val="accent1">
+                    <a:shade val="15000"/>
+                  </a:schemeClr>
+                </a:solidFill>
+                <a:prstDash val="solid"/>
+              </a14:hiddenLine>
+            </a:ext>
+          </a:extLst>
+        </p:spPr>
+        <p:style>
+          <a:lnRef idx="2">
+            <a:schemeClr val="accent1">
+              <a:shade val="15000"/>
+            </a:schemeClr>
+          </a:lnRef>
+          <a:fillRef idx="1">
+            <a:schemeClr val="accent1"/>
+          </a:fillRef>
+          <a:effectRef idx="0">
+            <a:schemeClr val="accent1"/>
+          </a:effectRef>
+          <a:fontRef idx="minor">
+            <a:schemeClr val="lt1"/>
+          </a:fontRef>
+        </p:style>
+        <p:txBody>
+          <a:bodyPr rtlCol="0" anchor="ctr"/>
+          <a:lstStyle/>
+          <a:p>
+            <a:pPr algn="ctr"/>
+            <a:endParaRPr lang="zh-TW" altLang="en-US"/>
+          </a:p>
+        </p:txBody>
+      </p:sp>
+      <p:sp>
+        <p:nvSpPr>
+          <p:cNvPr id="28" name="文字方塊 27">
+            <a:extLst>
+              <a:ext uri="{FF2B5EF4-FFF2-40B4-BE49-F238E27FC236}">
+                <a16:creationId xmlns:a16="http://schemas.microsoft.com/office/drawing/2014/main" id="{76BDD57B-E819-530B-4AE4-95749FD4C3B9}"/>
+              </a:ext>
+            </a:extLst>
+          </p:cNvPr>
+          <p:cNvSpPr txBox="1"/>
+          <p:nvPr/>
+        </p:nvSpPr>
+        <p:spPr>
+          <a:xfrm>
+            <a:off x="749808" y="2459736"/>
+            <a:ext cx="1463040" cy="248786"/>
+          </a:xfrm>
+          <a:prstGeom prst="rect">
+            <a:avLst/>
+          </a:prstGeom>
+          <a:noFill/>
+        </p:spPr>
+        <p:txBody>
+          <a:bodyPr vert="horz" lIns="38100" tIns="12700" rIns="38100" bIns="12700" rtlCol="0">
+            <a:spAutoFit/>
+          </a:bodyPr>
+          <a:lstStyle/>
+          <a:p>
+            <a:pPr algn="ctr"/>
+            <a:r>
+              <a:rPr lang="zh-TW" altLang="en-US" sz="1450">
+                <a:solidFill>
+                  <a:srgbClr val="25323C"/>
+                </a:solidFill>
+                <a:latin typeface="Microsoft JhengHei" panose="020B0604030504040204" pitchFamily="34" charset="-120"/>
+              </a:rPr>
+              <a:t>保守</a:t>
+            </a:r>
+          </a:p>
+        </p:txBody>
+      </p:sp>
+      <p:sp>
+        <p:nvSpPr>
+          <p:cNvPr id="29" name="文字方塊 28">
+            <a:extLst>
+              <a:ext uri="{FF2B5EF4-FFF2-40B4-BE49-F238E27FC236}">
+                <a16:creationId xmlns:a16="http://schemas.microsoft.com/office/drawing/2014/main" id="{1C779168-FDB2-D1D3-A4A6-C70A7EC258F3}"/>
+              </a:ext>
+            </a:extLst>
+          </p:cNvPr>
+          <p:cNvSpPr txBox="1"/>
+          <p:nvPr/>
+        </p:nvSpPr>
+        <p:spPr>
+          <a:xfrm>
+            <a:off x="2304288" y="2459736"/>
+            <a:ext cx="1645920" cy="248786"/>
+          </a:xfrm>
+          <a:prstGeom prst="rect">
+            <a:avLst/>
+          </a:prstGeom>
+          <a:noFill/>
+        </p:spPr>
+        <p:txBody>
+          <a:bodyPr vert="horz" lIns="38100" tIns="12700" rIns="38100" bIns="12700" rtlCol="0">
+            <a:spAutoFit/>
+          </a:bodyPr>
+          <a:lstStyle/>
+          <a:p>
+            <a:pPr algn="ctr"/>
+            <a:r>
+              <a:rPr lang="en-US" altLang="zh-TW" sz="1450">
+                <a:solidFill>
+                  <a:srgbClr val="25323C"/>
+                </a:solidFill>
+                <a:latin typeface="Microsoft JhengHei" panose="020B0604030504040204" pitchFamily="34" charset="-120"/>
+              </a:rPr>
+              <a:t>120 </a:t>
             </a:r>
             <a:r>
-              <a:rPr lang="zh-TW" altLang="en-US" sz="1500" b="1">
-                <a:solidFill>
-                  <a:srgbClr val="202A33"/>
-                </a:solidFill>
+              <a:rPr lang="zh-TW" altLang="en-US" sz="1450">
+                <a:solidFill>
+                  <a:srgbClr val="25323C"/>
+                </a:solidFill>
+                <a:latin typeface="Microsoft JhengHei" panose="020B0604030504040204" pitchFamily="34" charset="-120"/>
               </a:rPr>
-              <a:t>工具回歸：</a:t>
+              <a:t>件</a:t>
+            </a:r>
+          </a:p>
+        </p:txBody>
+      </p:sp>
+      <p:sp>
+        <p:nvSpPr>
+          <p:cNvPr id="30" name="文字方塊 29">
+            <a:extLst>
+              <a:ext uri="{FF2B5EF4-FFF2-40B4-BE49-F238E27FC236}">
+                <a16:creationId xmlns:a16="http://schemas.microsoft.com/office/drawing/2014/main" id="{61F8799B-5723-041F-424A-9C6D93B4B683}"/>
+              </a:ext>
+            </a:extLst>
+          </p:cNvPr>
+          <p:cNvSpPr txBox="1"/>
+          <p:nvPr/>
+        </p:nvSpPr>
+        <p:spPr>
+          <a:xfrm>
+            <a:off x="4069080" y="2459736"/>
+            <a:ext cx="1965960" cy="248786"/>
+          </a:xfrm>
+          <a:prstGeom prst="rect">
+            <a:avLst/>
+          </a:prstGeom>
+          <a:noFill/>
+        </p:spPr>
+        <p:txBody>
+          <a:bodyPr vert="horz" lIns="38100" tIns="12700" rIns="38100" bIns="12700" rtlCol="0">
+            <a:spAutoFit/>
+          </a:bodyPr>
+          <a:lstStyle/>
+          <a:p>
+            <a:pPr algn="ctr"/>
+            <a:r>
+              <a:rPr lang="en-US" altLang="zh-TW" sz="1450">
+                <a:solidFill>
+                  <a:srgbClr val="25323C"/>
+                </a:solidFill>
+                <a:latin typeface="Microsoft JhengHei" panose="020B0604030504040204" pitchFamily="34" charset="-120"/>
+              </a:rPr>
+              <a:t>10 </a:t>
             </a:r>
             <a:r>
-              <a:rPr lang="en-US" altLang="zh-TW" sz="1500" b="1">
-                <a:solidFill>
-                  <a:srgbClr val="202A33"/>
-                </a:solidFill>
+              <a:rPr lang="zh-TW" altLang="en-US" sz="1450">
+                <a:solidFill>
+                  <a:srgbClr val="25323C"/>
+                </a:solidFill>
+                <a:latin typeface="Microsoft JhengHei" panose="020B0604030504040204" pitchFamily="34" charset="-120"/>
               </a:rPr>
-              <a:t>30 </a:t>
+              <a:t>分鐘</a:t>
+            </a:r>
+          </a:p>
+        </p:txBody>
+      </p:sp>
+      <p:sp>
+        <p:nvSpPr>
+          <p:cNvPr id="31" name="文字方塊 30">
+            <a:extLst>
+              <a:ext uri="{FF2B5EF4-FFF2-40B4-BE49-F238E27FC236}">
+                <a16:creationId xmlns:a16="http://schemas.microsoft.com/office/drawing/2014/main" id="{B8B7A9D0-9483-5476-2495-85B6750F7D8C}"/>
+              </a:ext>
+            </a:extLst>
+          </p:cNvPr>
+          <p:cNvSpPr txBox="1"/>
+          <p:nvPr/>
+        </p:nvSpPr>
+        <p:spPr>
+          <a:xfrm>
+            <a:off x="6126480" y="2459736"/>
+            <a:ext cx="1920240" cy="248786"/>
+          </a:xfrm>
+          <a:prstGeom prst="rect">
+            <a:avLst/>
+          </a:prstGeom>
+          <a:noFill/>
+        </p:spPr>
+        <p:txBody>
+          <a:bodyPr vert="horz" lIns="38100" tIns="12700" rIns="38100" bIns="12700" rtlCol="0">
+            <a:spAutoFit/>
+          </a:bodyPr>
+          <a:lstStyle/>
+          <a:p>
+            <a:pPr algn="ctr"/>
+            <a:r>
+              <a:rPr lang="en-US" altLang="zh-TW" sz="1450">
+                <a:solidFill>
+                  <a:srgbClr val="25323C"/>
+                </a:solidFill>
+                <a:latin typeface="Microsoft JhengHei" panose="020B0604030504040204" pitchFamily="34" charset="-120"/>
+              </a:rPr>
+              <a:t>20 </a:t>
             </a:r>
             <a:r>
-              <a:rPr lang="zh-TW" altLang="en-US" sz="1500" b="1">
-                <a:solidFill>
-                  <a:srgbClr val="202A33"/>
-                </a:solidFill>
+              <a:rPr lang="zh-TW" altLang="en-US" sz="1450">
+                <a:solidFill>
+                  <a:srgbClr val="25323C"/>
+                </a:solidFill>
+                <a:latin typeface="Microsoft JhengHei" panose="020B0604030504040204" pitchFamily="34" charset="-120"/>
               </a:rPr>
-              <a:t>項檢查通過；</a:t>
+              <a:t>小時</a:t>
             </a:r>
+          </a:p>
+        </p:txBody>
+      </p:sp>
+      <p:sp>
+        <p:nvSpPr>
+          <p:cNvPr id="32" name="文字方塊 31">
+            <a:extLst>
+              <a:ext uri="{FF2B5EF4-FFF2-40B4-BE49-F238E27FC236}">
+                <a16:creationId xmlns:a16="http://schemas.microsoft.com/office/drawing/2014/main" id="{088E4C22-7A9C-5C5D-FA63-D4C2FA12050B}"/>
+              </a:ext>
+            </a:extLst>
+          </p:cNvPr>
+          <p:cNvSpPr txBox="1"/>
+          <p:nvPr/>
+        </p:nvSpPr>
+        <p:spPr>
+          <a:xfrm>
+            <a:off x="8138160" y="2459736"/>
+            <a:ext cx="2834640" cy="248786"/>
+          </a:xfrm>
+          <a:prstGeom prst="rect">
+            <a:avLst/>
+          </a:prstGeom>
+          <a:noFill/>
+        </p:spPr>
+        <p:txBody>
+          <a:bodyPr vert="horz" lIns="38100" tIns="12700" rIns="38100" bIns="12700" rtlCol="0">
+            <a:spAutoFit/>
+          </a:bodyPr>
+          <a:lstStyle/>
+          <a:p>
+            <a:pPr algn="ctr"/>
             <a:r>
-              <a:rPr lang="en-US" altLang="zh-TW" sz="1500" b="1">
-                <a:solidFill>
-                  <a:srgbClr val="202A33"/>
-                </a:solidFill>
+              <a:rPr lang="en-US" altLang="zh-TW" sz="1450">
+                <a:solidFill>
+                  <a:srgbClr val="25323C"/>
+                </a:solidFill>
+                <a:latin typeface="Microsoft JhengHei" panose="020B0604030504040204" pitchFamily="34" charset="-120"/>
               </a:rPr>
-              <a:t>1,000 </a:t>
+              <a:t>NT$18,000</a:t>
             </a:r>
-            <a:r>
-              <a:rPr lang="zh-TW" altLang="en-US" sz="1500" b="1">
-                <a:solidFill>
-                  <a:srgbClr val="202A33"/>
-                </a:solidFill>
-              </a:rPr>
-              <a:t>筆案例已準備但未逐筆執行。</a:t>
-            </a:r>
-            <a:endParaRPr sz="1500" b="1">
+            <a:endParaRPr lang="zh-TW" altLang="en-US" sz="1450">
               <a:solidFill>
-                <a:srgbClr val="202A33"/>
+                <a:srgbClr val="25323C"/>
               </a:solidFill>
+              <a:latin typeface="Microsoft JhengHei" panose="020B0604030504040204" pitchFamily="34" charset="-120"/>
             </a:endParaRPr>
           </a:p>
         </p:txBody>
       </p:sp>
       <p:sp>
         <p:nvSpPr>
-          <p:cNvPr id="18" name="矩形 17">
+          <p:cNvPr id="33" name="矩形 32">
             <a:extLst>
               <a:ext uri="{FF2B5EF4-FFF2-40B4-BE49-F238E27FC236}">
-                <a16:creationId xmlns:a16="http://schemas.microsoft.com/office/drawing/2014/main" id="{4FD674CD-3AE3-4C75-B07D-28B42B468AF6}"/>
+                <a16:creationId xmlns:a16="http://schemas.microsoft.com/office/drawing/2014/main" id="{7DED3DC2-F167-BFA9-D1FE-703677A78F51}"/>
               </a:ext>
             </a:extLst>
           </p:cNvPr>
-          <p:cNvSpPr>
-            <a:spLocks noGrp="1"/>
-          </p:cNvSpPr>
+          <p:cNvSpPr/>
           <p:nvPr/>
         </p:nvSpPr>
         <p:spPr>
           <a:xfrm>
-            <a:off x="685800" y="5829300"/>
-            <a:ext cx="10477500" cy="304800"/>
+            <a:off x="749808" y="2834640"/>
+            <a:ext cx="10222992" cy="356616"/>
+          </a:xfrm>
+          <a:prstGeom prst="rect">
+            <a:avLst/>
+          </a:prstGeom>
+          <a:solidFill>
+            <a:srgbClr val="F7FAFC"/>
+          </a:solidFill>
+          <a:ln w="19050">
+            <a:noFill/>
+            <a:prstDash val="solid"/>
+          </a:ln>
+          <a:effectLst/>
+          <a:extLst>
+            <a:ext uri="{91240B29-F687-4F45-9708-019B960494DF}">
+              <a14:hiddenLine xmlns:a14="http://schemas.microsoft.com/office/drawing/2010/main" w="19050">
+                <a:solidFill>
+                  <a:schemeClr val="accent1">
+                    <a:shade val="15000"/>
+                  </a:schemeClr>
+                </a:solidFill>
+                <a:prstDash val="solid"/>
+              </a14:hiddenLine>
+            </a:ext>
+          </a:extLst>
+        </p:spPr>
+        <p:style>
+          <a:lnRef idx="2">
+            <a:schemeClr val="accent1">
+              <a:shade val="15000"/>
+            </a:schemeClr>
+          </a:lnRef>
+          <a:fillRef idx="1">
+            <a:schemeClr val="accent1"/>
+          </a:fillRef>
+          <a:effectRef idx="0">
+            <a:schemeClr val="accent1"/>
+          </a:effectRef>
+          <a:fontRef idx="minor">
+            <a:schemeClr val="lt1"/>
+          </a:fontRef>
+        </p:style>
+        <p:txBody>
+          <a:bodyPr rtlCol="0" anchor="ctr"/>
+          <a:lstStyle/>
+          <a:p>
+            <a:pPr algn="ctr"/>
+            <a:endParaRPr lang="zh-TW" altLang="en-US"/>
+          </a:p>
+        </p:txBody>
+      </p:sp>
+      <p:sp>
+        <p:nvSpPr>
+          <p:cNvPr id="34" name="文字方塊 33">
+            <a:extLst>
+              <a:ext uri="{FF2B5EF4-FFF2-40B4-BE49-F238E27FC236}">
+                <a16:creationId xmlns:a16="http://schemas.microsoft.com/office/drawing/2014/main" id="{4F6BA342-8776-7A79-581A-9EC449AF9569}"/>
+              </a:ext>
+            </a:extLst>
+          </p:cNvPr>
+          <p:cNvSpPr txBox="1"/>
+          <p:nvPr/>
+        </p:nvSpPr>
+        <p:spPr>
+          <a:xfrm>
+            <a:off x="749808" y="2843784"/>
+            <a:ext cx="1463040" cy="248786"/>
           </a:xfrm>
           <a:prstGeom prst="rect">
             <a:avLst/>
           </a:prstGeom>
           <a:noFill/>
-          <a:ln w="0">
+        </p:spPr>
+        <p:txBody>
+          <a:bodyPr vert="horz" lIns="38100" tIns="12700" rIns="38100" bIns="12700" rtlCol="0">
+            <a:spAutoFit/>
+          </a:bodyPr>
+          <a:lstStyle/>
+          <a:p>
+            <a:pPr algn="ctr"/>
+            <a:r>
+              <a:rPr lang="zh-TW" altLang="en-US" sz="1450" b="1">
+                <a:solidFill>
+                  <a:srgbClr val="25323C"/>
+                </a:solidFill>
+                <a:latin typeface="Microsoft JhengHei" panose="020B0604030504040204" pitchFamily="34" charset="-120"/>
+              </a:rPr>
+              <a:t>基準</a:t>
+            </a:r>
+          </a:p>
+        </p:txBody>
+      </p:sp>
+      <p:sp>
+        <p:nvSpPr>
+          <p:cNvPr id="35" name="文字方塊 34">
+            <a:extLst>
+              <a:ext uri="{FF2B5EF4-FFF2-40B4-BE49-F238E27FC236}">
+                <a16:creationId xmlns:a16="http://schemas.microsoft.com/office/drawing/2014/main" id="{D948CA8C-DCD1-3CAD-A1B6-DD2A6570DB62}"/>
+              </a:ext>
+            </a:extLst>
+          </p:cNvPr>
+          <p:cNvSpPr txBox="1"/>
+          <p:nvPr/>
+        </p:nvSpPr>
+        <p:spPr>
+          <a:xfrm>
+            <a:off x="2304288" y="2843784"/>
+            <a:ext cx="1645920" cy="248786"/>
+          </a:xfrm>
+          <a:prstGeom prst="rect">
+            <a:avLst/>
+          </a:prstGeom>
+          <a:noFill/>
+        </p:spPr>
+        <p:txBody>
+          <a:bodyPr vert="horz" lIns="38100" tIns="12700" rIns="38100" bIns="12700" rtlCol="0">
+            <a:spAutoFit/>
+          </a:bodyPr>
+          <a:lstStyle/>
+          <a:p>
+            <a:pPr algn="ctr"/>
+            <a:r>
+              <a:rPr lang="en-US" altLang="zh-TW" sz="1450">
+                <a:solidFill>
+                  <a:srgbClr val="25323C"/>
+                </a:solidFill>
+                <a:latin typeface="Microsoft JhengHei" panose="020B0604030504040204" pitchFamily="34" charset="-120"/>
+              </a:rPr>
+              <a:t>300 </a:t>
+            </a:r>
+            <a:r>
+              <a:rPr lang="zh-TW" altLang="en-US" sz="1450">
+                <a:solidFill>
+                  <a:srgbClr val="25323C"/>
+                </a:solidFill>
+                <a:latin typeface="Microsoft JhengHei" panose="020B0604030504040204" pitchFamily="34" charset="-120"/>
+              </a:rPr>
+              <a:t>件</a:t>
+            </a:r>
+          </a:p>
+        </p:txBody>
+      </p:sp>
+      <p:sp>
+        <p:nvSpPr>
+          <p:cNvPr id="36" name="文字方塊 35">
+            <a:extLst>
+              <a:ext uri="{FF2B5EF4-FFF2-40B4-BE49-F238E27FC236}">
+                <a16:creationId xmlns:a16="http://schemas.microsoft.com/office/drawing/2014/main" id="{DA54F61C-B40C-D919-E93D-4E84F04F6141}"/>
+              </a:ext>
+            </a:extLst>
+          </p:cNvPr>
+          <p:cNvSpPr txBox="1"/>
+          <p:nvPr/>
+        </p:nvSpPr>
+        <p:spPr>
+          <a:xfrm>
+            <a:off x="4069080" y="2843784"/>
+            <a:ext cx="1965960" cy="248786"/>
+          </a:xfrm>
+          <a:prstGeom prst="rect">
+            <a:avLst/>
+          </a:prstGeom>
+          <a:noFill/>
+        </p:spPr>
+        <p:txBody>
+          <a:bodyPr vert="horz" lIns="38100" tIns="12700" rIns="38100" bIns="12700" rtlCol="0">
+            <a:spAutoFit/>
+          </a:bodyPr>
+          <a:lstStyle/>
+          <a:p>
+            <a:pPr algn="ctr"/>
+            <a:r>
+              <a:rPr lang="en-US" altLang="zh-TW" sz="1450">
+                <a:solidFill>
+                  <a:srgbClr val="25323C"/>
+                </a:solidFill>
+                <a:latin typeface="Microsoft JhengHei" panose="020B0604030504040204" pitchFamily="34" charset="-120"/>
+              </a:rPr>
+              <a:t>20 </a:t>
+            </a:r>
+            <a:r>
+              <a:rPr lang="zh-TW" altLang="en-US" sz="1450">
+                <a:solidFill>
+                  <a:srgbClr val="25323C"/>
+                </a:solidFill>
+                <a:latin typeface="Microsoft JhengHei" panose="020B0604030504040204" pitchFamily="34" charset="-120"/>
+              </a:rPr>
+              <a:t>分鐘</a:t>
+            </a:r>
+          </a:p>
+        </p:txBody>
+      </p:sp>
+      <p:sp>
+        <p:nvSpPr>
+          <p:cNvPr id="37" name="文字方塊 36">
+            <a:extLst>
+              <a:ext uri="{FF2B5EF4-FFF2-40B4-BE49-F238E27FC236}">
+                <a16:creationId xmlns:a16="http://schemas.microsoft.com/office/drawing/2014/main" id="{DCFCD65C-31EA-732A-4ACE-1FC54416EA2E}"/>
+              </a:ext>
+            </a:extLst>
+          </p:cNvPr>
+          <p:cNvSpPr txBox="1"/>
+          <p:nvPr/>
+        </p:nvSpPr>
+        <p:spPr>
+          <a:xfrm>
+            <a:off x="6126480" y="2843784"/>
+            <a:ext cx="1920240" cy="248786"/>
+          </a:xfrm>
+          <a:prstGeom prst="rect">
+            <a:avLst/>
+          </a:prstGeom>
+          <a:noFill/>
+        </p:spPr>
+        <p:txBody>
+          <a:bodyPr vert="horz" lIns="38100" tIns="12700" rIns="38100" bIns="12700" rtlCol="0">
+            <a:spAutoFit/>
+          </a:bodyPr>
+          <a:lstStyle/>
+          <a:p>
+            <a:pPr algn="ctr"/>
+            <a:r>
+              <a:rPr lang="en-US" altLang="zh-TW" sz="1450">
+                <a:solidFill>
+                  <a:srgbClr val="25323C"/>
+                </a:solidFill>
+                <a:latin typeface="Microsoft JhengHei" panose="020B0604030504040204" pitchFamily="34" charset="-120"/>
+              </a:rPr>
+              <a:t>100 </a:t>
+            </a:r>
+            <a:r>
+              <a:rPr lang="zh-TW" altLang="en-US" sz="1450">
+                <a:solidFill>
+                  <a:srgbClr val="25323C"/>
+                </a:solidFill>
+                <a:latin typeface="Microsoft JhengHei" panose="020B0604030504040204" pitchFamily="34" charset="-120"/>
+              </a:rPr>
+              <a:t>小時</a:t>
+            </a:r>
+          </a:p>
+        </p:txBody>
+      </p:sp>
+      <p:sp>
+        <p:nvSpPr>
+          <p:cNvPr id="38" name="文字方塊 37">
+            <a:extLst>
+              <a:ext uri="{FF2B5EF4-FFF2-40B4-BE49-F238E27FC236}">
+                <a16:creationId xmlns:a16="http://schemas.microsoft.com/office/drawing/2014/main" id="{5FE4F180-D44D-3E70-A28A-2C29EFBDBBDB}"/>
+              </a:ext>
+            </a:extLst>
+          </p:cNvPr>
+          <p:cNvSpPr txBox="1"/>
+          <p:nvPr/>
+        </p:nvSpPr>
+        <p:spPr>
+          <a:xfrm>
+            <a:off x="8138160" y="2843784"/>
+            <a:ext cx="2834640" cy="248786"/>
+          </a:xfrm>
+          <a:prstGeom prst="rect">
+            <a:avLst/>
+          </a:prstGeom>
+          <a:noFill/>
+        </p:spPr>
+        <p:txBody>
+          <a:bodyPr vert="horz" lIns="38100" tIns="12700" rIns="38100" bIns="12700" rtlCol="0">
+            <a:spAutoFit/>
+          </a:bodyPr>
+          <a:lstStyle/>
+          <a:p>
+            <a:pPr algn="ctr"/>
+            <a:r>
+              <a:rPr lang="en-US" altLang="zh-TW" sz="1450">
+                <a:solidFill>
+                  <a:srgbClr val="25323C"/>
+                </a:solidFill>
+                <a:latin typeface="Microsoft JhengHei" panose="020B0604030504040204" pitchFamily="34" charset="-120"/>
+              </a:rPr>
+              <a:t>NT$90,000</a:t>
+            </a:r>
+            <a:endParaRPr lang="zh-TW" altLang="en-US" sz="1450">
+              <a:solidFill>
+                <a:srgbClr val="25323C"/>
+              </a:solidFill>
+              <a:latin typeface="Microsoft JhengHei" panose="020B0604030504040204" pitchFamily="34" charset="-120"/>
+            </a:endParaRPr>
+          </a:p>
+        </p:txBody>
+      </p:sp>
+      <p:sp>
+        <p:nvSpPr>
+          <p:cNvPr id="39" name="矩形 38">
+            <a:extLst>
+              <a:ext uri="{FF2B5EF4-FFF2-40B4-BE49-F238E27FC236}">
+                <a16:creationId xmlns:a16="http://schemas.microsoft.com/office/drawing/2014/main" id="{A936B198-1F22-04CB-DF13-8A50DD16A69A}"/>
+              </a:ext>
+            </a:extLst>
+          </p:cNvPr>
+          <p:cNvSpPr/>
+          <p:nvPr/>
+        </p:nvSpPr>
+        <p:spPr>
+          <a:xfrm>
+            <a:off x="749808" y="3218688"/>
+            <a:ext cx="10222992" cy="356616"/>
+          </a:xfrm>
+          <a:prstGeom prst="rect">
+            <a:avLst/>
+          </a:prstGeom>
+          <a:solidFill>
+            <a:srgbClr val="FFFFFF"/>
+          </a:solidFill>
+          <a:ln w="19050">
             <a:noFill/>
             <a:prstDash val="solid"/>
           </a:ln>
+          <a:effectLst/>
+          <a:extLst>
+            <a:ext uri="{91240B29-F687-4F45-9708-019B960494DF}">
+              <a14:hiddenLine xmlns:a14="http://schemas.microsoft.com/office/drawing/2010/main" w="19050">
+                <a:solidFill>
+                  <a:schemeClr val="accent1">
+                    <a:shade val="15000"/>
+                  </a:schemeClr>
+                </a:solidFill>
+                <a:prstDash val="solid"/>
+              </a14:hiddenLine>
+            </a:ext>
+          </a:extLst>
+        </p:spPr>
+        <p:style>
+          <a:lnRef idx="2">
+            <a:schemeClr val="accent1">
+              <a:shade val="15000"/>
+            </a:schemeClr>
+          </a:lnRef>
+          <a:fillRef idx="1">
+            <a:schemeClr val="accent1"/>
+          </a:fillRef>
+          <a:effectRef idx="0">
+            <a:schemeClr val="accent1"/>
+          </a:effectRef>
+          <a:fontRef idx="minor">
+            <a:schemeClr val="lt1"/>
+          </a:fontRef>
+        </p:style>
+        <p:txBody>
+          <a:bodyPr rtlCol="0" anchor="ctr"/>
+          <a:lstStyle/>
+          <a:p>
+            <a:pPr algn="ctr"/>
+            <a:endParaRPr lang="zh-TW" altLang="en-US"/>
+          </a:p>
+        </p:txBody>
+      </p:sp>
+      <p:sp>
+        <p:nvSpPr>
+          <p:cNvPr id="40" name="文字方塊 39">
+            <a:extLst>
+              <a:ext uri="{FF2B5EF4-FFF2-40B4-BE49-F238E27FC236}">
+                <a16:creationId xmlns:a16="http://schemas.microsoft.com/office/drawing/2014/main" id="{746CB929-EF3E-7ACF-4398-5C6E663F0CBF}"/>
+              </a:ext>
+            </a:extLst>
+          </p:cNvPr>
+          <p:cNvSpPr txBox="1"/>
+          <p:nvPr/>
+        </p:nvSpPr>
+        <p:spPr>
+          <a:xfrm>
+            <a:off x="749808" y="3227832"/>
+            <a:ext cx="1463040" cy="248786"/>
+          </a:xfrm>
+          <a:prstGeom prst="rect">
+            <a:avLst/>
+          </a:prstGeom>
+          <a:noFill/>
         </p:spPr>
         <p:txBody>
-          <a:bodyPr/>
-          <a:lstStyle>
-            <a:defPPr>
-              <a:defRPr sz="1275" b="0">
-                <a:solidFill>
-                  <a:srgbClr val="59656E"/>
-                </a:solidFill>
-              </a:defRPr>
-            </a:defPPr>
-            <a:lvl1pPr>
-              <a:defRPr sz="1275" b="0">
-                <a:solidFill>
-                  <a:srgbClr val="59656E"/>
-                </a:solidFill>
-              </a:defRPr>
-            </a:lvl1pPr>
-            <a:lvl2pPr>
-              <a:defRPr sz="1275" b="0">
-                <a:solidFill>
-                  <a:srgbClr val="59656E"/>
-                </a:solidFill>
-              </a:defRPr>
-            </a:lvl2pPr>
-            <a:lvl3pPr>
-              <a:defRPr sz="1275" b="0">
-                <a:solidFill>
-                  <a:srgbClr val="59656E"/>
-                </a:solidFill>
-              </a:defRPr>
-            </a:lvl3pPr>
-            <a:lvl4pPr>
-              <a:defRPr sz="1275" b="0">
-                <a:solidFill>
-                  <a:srgbClr val="59656E"/>
-                </a:solidFill>
-              </a:defRPr>
-            </a:lvl4pPr>
-            <a:lvl5pPr>
-              <a:defRPr sz="1275" b="0">
-                <a:solidFill>
-                  <a:srgbClr val="59656E"/>
-                </a:solidFill>
-              </a:defRPr>
-            </a:lvl5pPr>
-            <a:lvl6pPr>
-              <a:defRPr sz="1275" b="0">
-                <a:solidFill>
-                  <a:srgbClr val="59656E"/>
-                </a:solidFill>
-              </a:defRPr>
-            </a:lvl6pPr>
-            <a:lvl7pPr>
-              <a:defRPr sz="1275" b="0">
-                <a:solidFill>
-                  <a:srgbClr val="59656E"/>
-                </a:solidFill>
-              </a:defRPr>
-            </a:lvl7pPr>
-            <a:lvl8pPr>
-              <a:defRPr sz="1275" b="0">
-                <a:solidFill>
-                  <a:srgbClr val="59656E"/>
-                </a:solidFill>
-              </a:defRPr>
-            </a:lvl8pPr>
-            <a:lvl9pPr>
-              <a:defRPr sz="1275" b="0">
-                <a:solidFill>
-                  <a:srgbClr val="59656E"/>
-                </a:solidFill>
-              </a:defRPr>
-            </a:lvl9pPr>
-          </a:lstStyle>
+          <a:bodyPr vert="horz" lIns="38100" tIns="12700" rIns="38100" bIns="12700" rtlCol="0">
+            <a:spAutoFit/>
+          </a:bodyPr>
+          <a:lstStyle/>
           <a:p>
-            <a:pPr>
-              <a:defRPr sz="1275" b="0">
-                <a:solidFill>
-                  <a:srgbClr val="59656E"/>
-                </a:solidFill>
-              </a:defRPr>
-            </a:pPr>
+            <a:pPr algn="ctr"/>
             <a:r>
-              <a:rPr lang="en-US" sz="1275" b="0">
-                <a:solidFill>
-                  <a:srgbClr val="59656E"/>
-                </a:solidFill>
+              <a:rPr lang="zh-TW" altLang="en-US" sz="1450">
+                <a:solidFill>
+                  <a:srgbClr val="25323C"/>
+                </a:solidFill>
+                <a:latin typeface="Microsoft JhengHei" panose="020B0604030504040204" pitchFamily="34" charset="-120"/>
               </a:rPr>
-              <a:t>Formatter formatText </a:t>
+              <a:t>高量</a:t>
+            </a:r>
+          </a:p>
+        </p:txBody>
+      </p:sp>
+      <p:sp>
+        <p:nvSpPr>
+          <p:cNvPr id="41" name="文字方塊 40">
+            <a:extLst>
+              <a:ext uri="{FF2B5EF4-FFF2-40B4-BE49-F238E27FC236}">
+                <a16:creationId xmlns:a16="http://schemas.microsoft.com/office/drawing/2014/main" id="{5E6B7506-FE58-32DE-5E3E-44B8DD3726B5}"/>
+              </a:ext>
+            </a:extLst>
+          </p:cNvPr>
+          <p:cNvSpPr txBox="1"/>
+          <p:nvPr/>
+        </p:nvSpPr>
+        <p:spPr>
+          <a:xfrm>
+            <a:off x="2304288" y="3227832"/>
+            <a:ext cx="1645920" cy="248786"/>
+          </a:xfrm>
+          <a:prstGeom prst="rect">
+            <a:avLst/>
+          </a:prstGeom>
+          <a:noFill/>
+        </p:spPr>
+        <p:txBody>
+          <a:bodyPr vert="horz" lIns="38100" tIns="12700" rIns="38100" bIns="12700" rtlCol="0">
+            <a:spAutoFit/>
+          </a:bodyPr>
+          <a:lstStyle/>
+          <a:p>
+            <a:pPr algn="ctr"/>
+            <a:r>
+              <a:rPr lang="en-US" altLang="zh-TW" sz="1450">
+                <a:solidFill>
+                  <a:srgbClr val="25323C"/>
+                </a:solidFill>
+                <a:latin typeface="Microsoft JhengHei" panose="020B0604030504040204" pitchFamily="34" charset="-120"/>
+              </a:rPr>
+              <a:t>600 </a:t>
             </a:r>
             <a:r>
-              <a:rPr lang="zh-TW" altLang="en-US" sz="1275" b="0">
-                <a:solidFill>
-                  <a:srgbClr val="59656E"/>
-                </a:solidFill>
+              <a:rPr lang="zh-TW" altLang="en-US" sz="1450">
+                <a:solidFill>
+                  <a:srgbClr val="25323C"/>
+                </a:solidFill>
+                <a:latin typeface="Microsoft JhengHei" panose="020B0604030504040204" pitchFamily="34" charset="-120"/>
               </a:rPr>
-              <a:t>微基準只量函式效能，不代表端到端或人工效益；配對試次尚無實測，</a:t>
+              <a:t>件</a:t>
+            </a:r>
+          </a:p>
+        </p:txBody>
+      </p:sp>
+      <p:sp>
+        <p:nvSpPr>
+          <p:cNvPr id="42" name="文字方塊 41">
+            <a:extLst>
+              <a:ext uri="{FF2B5EF4-FFF2-40B4-BE49-F238E27FC236}">
+                <a16:creationId xmlns:a16="http://schemas.microsoft.com/office/drawing/2014/main" id="{FEA2C12C-DE53-3378-0443-7C0BD230C803}"/>
+              </a:ext>
+            </a:extLst>
+          </p:cNvPr>
+          <p:cNvSpPr txBox="1"/>
+          <p:nvPr/>
+        </p:nvSpPr>
+        <p:spPr>
+          <a:xfrm>
+            <a:off x="4069080" y="3227832"/>
+            <a:ext cx="1965960" cy="248786"/>
+          </a:xfrm>
+          <a:prstGeom prst="rect">
+            <a:avLst/>
+          </a:prstGeom>
+          <a:noFill/>
+        </p:spPr>
+        <p:txBody>
+          <a:bodyPr vert="horz" lIns="38100" tIns="12700" rIns="38100" bIns="12700" rtlCol="0">
+            <a:spAutoFit/>
+          </a:bodyPr>
+          <a:lstStyle/>
+          <a:p>
+            <a:pPr algn="ctr"/>
+            <a:r>
+              <a:rPr lang="en-US" altLang="zh-TW" sz="1450">
+                <a:solidFill>
+                  <a:srgbClr val="25323C"/>
+                </a:solidFill>
+                <a:latin typeface="Microsoft JhengHei" panose="020B0604030504040204" pitchFamily="34" charset="-120"/>
+              </a:rPr>
+              <a:t>30 </a:t>
             </a:r>
             <a:r>
-              <a:rPr lang="en-US" sz="1275" b="0">
-                <a:solidFill>
-                  <a:srgbClr val="59656E"/>
-                </a:solidFill>
+              <a:rPr lang="zh-TW" altLang="en-US" sz="1450">
+                <a:solidFill>
+                  <a:srgbClr val="25323C"/>
+                </a:solidFill>
+                <a:latin typeface="Microsoft JhengHei" panose="020B0604030504040204" pitchFamily="34" charset="-120"/>
               </a:rPr>
-              <a:t>Excel </a:t>
+              <a:t>分鐘</a:t>
+            </a:r>
+          </a:p>
+        </p:txBody>
+      </p:sp>
+      <p:sp>
+        <p:nvSpPr>
+          <p:cNvPr id="43" name="文字方塊 42">
+            <a:extLst>
+              <a:ext uri="{FF2B5EF4-FFF2-40B4-BE49-F238E27FC236}">
+                <a16:creationId xmlns:a16="http://schemas.microsoft.com/office/drawing/2014/main" id="{2CB15DBA-1F35-EFD5-F8D1-D50610698437}"/>
+              </a:ext>
+            </a:extLst>
+          </p:cNvPr>
+          <p:cNvSpPr txBox="1"/>
+          <p:nvPr/>
+        </p:nvSpPr>
+        <p:spPr>
+          <a:xfrm>
+            <a:off x="6126480" y="3227832"/>
+            <a:ext cx="1920240" cy="248786"/>
+          </a:xfrm>
+          <a:prstGeom prst="rect">
+            <a:avLst/>
+          </a:prstGeom>
+          <a:noFill/>
+        </p:spPr>
+        <p:txBody>
+          <a:bodyPr vert="horz" lIns="38100" tIns="12700" rIns="38100" bIns="12700" rtlCol="0">
+            <a:spAutoFit/>
+          </a:bodyPr>
+          <a:lstStyle/>
+          <a:p>
+            <a:pPr algn="ctr"/>
+            <a:r>
+              <a:rPr lang="en-US" altLang="zh-TW" sz="1450">
+                <a:solidFill>
+                  <a:srgbClr val="25323C"/>
+                </a:solidFill>
+                <a:latin typeface="Microsoft JhengHei" panose="020B0604030504040204" pitchFamily="34" charset="-120"/>
+              </a:rPr>
+              <a:t>300 </a:t>
             </a:r>
             <a:r>
-              <a:rPr lang="zh-TW" altLang="en-US" sz="1275" b="0">
-                <a:solidFill>
-                  <a:srgbClr val="59656E"/>
-                </a:solidFill>
+              <a:rPr lang="zh-TW" altLang="en-US" sz="1450">
+                <a:solidFill>
+                  <a:srgbClr val="25323C"/>
+                </a:solidFill>
+                <a:latin typeface="Microsoft JhengHei" panose="020B0604030504040204" pitchFamily="34" charset="-120"/>
               </a:rPr>
-              <a:t>成效欄保持空白。</a:t>
+              <a:t>小時</a:t>
             </a:r>
-            <a:endParaRPr sz="1275" b="0">
+          </a:p>
+        </p:txBody>
+      </p:sp>
+      <p:sp>
+        <p:nvSpPr>
+          <p:cNvPr id="44" name="文字方塊 43">
+            <a:extLst>
+              <a:ext uri="{FF2B5EF4-FFF2-40B4-BE49-F238E27FC236}">
+                <a16:creationId xmlns:a16="http://schemas.microsoft.com/office/drawing/2014/main" id="{E8F07AE3-212D-8536-C02F-BF0077EB86F6}"/>
+              </a:ext>
+            </a:extLst>
+          </p:cNvPr>
+          <p:cNvSpPr txBox="1"/>
+          <p:nvPr/>
+        </p:nvSpPr>
+        <p:spPr>
+          <a:xfrm>
+            <a:off x="8138160" y="3227832"/>
+            <a:ext cx="2834640" cy="248786"/>
+          </a:xfrm>
+          <a:prstGeom prst="rect">
+            <a:avLst/>
+          </a:prstGeom>
+          <a:noFill/>
+        </p:spPr>
+        <p:txBody>
+          <a:bodyPr vert="horz" lIns="38100" tIns="12700" rIns="38100" bIns="12700" rtlCol="0">
+            <a:spAutoFit/>
+          </a:bodyPr>
+          <a:lstStyle/>
+          <a:p>
+            <a:pPr algn="ctr"/>
+            <a:r>
+              <a:rPr lang="en-US" altLang="zh-TW" sz="1450">
+                <a:solidFill>
+                  <a:srgbClr val="25323C"/>
+                </a:solidFill>
+                <a:latin typeface="Microsoft JhengHei" panose="020B0604030504040204" pitchFamily="34" charset="-120"/>
+              </a:rPr>
+              <a:t>NT$270,000</a:t>
+            </a:r>
+            <a:endParaRPr lang="zh-TW" altLang="en-US" sz="1450">
               <a:solidFill>
-                <a:srgbClr val="59656E"/>
+                <a:srgbClr val="25323C"/>
               </a:solidFill>
+              <a:latin typeface="Microsoft JhengHei" panose="020B0604030504040204" pitchFamily="34" charset="-120"/>
+            </a:endParaRPr>
+          </a:p>
+        </p:txBody>
+      </p:sp>
+      <p:sp>
+        <p:nvSpPr>
+          <p:cNvPr id="45" name="文字方塊 44">
+            <a:extLst>
+              <a:ext uri="{FF2B5EF4-FFF2-40B4-BE49-F238E27FC236}">
+                <a16:creationId xmlns:a16="http://schemas.microsoft.com/office/drawing/2014/main" id="{48B186CD-953E-8D85-EDA8-A13F8D8F86FF}"/>
+              </a:ext>
+            </a:extLst>
+          </p:cNvPr>
+          <p:cNvSpPr txBox="1"/>
+          <p:nvPr/>
+        </p:nvSpPr>
+        <p:spPr>
+          <a:xfrm>
+            <a:off x="768096" y="3675888"/>
+            <a:ext cx="10607040" cy="228781"/>
+          </a:xfrm>
+          <a:prstGeom prst="rect">
+            <a:avLst/>
+          </a:prstGeom>
+          <a:noFill/>
+        </p:spPr>
+        <p:txBody>
+          <a:bodyPr vert="horz" lIns="38100" tIns="12700" rIns="38100" bIns="12700" rtlCol="0">
+            <a:spAutoFit/>
+          </a:bodyPr>
+          <a:lstStyle/>
+          <a:p>
+            <a:r>
+              <a:rPr lang="zh-TW" altLang="en-US" sz="1320">
+                <a:solidFill>
+                  <a:srgbClr val="25323C"/>
+                </a:solidFill>
+                <a:latin typeface="Microsoft JhengHei" panose="020B0604030504040204" pitchFamily="34" charset="-120"/>
+              </a:rPr>
+              <a:t>規劃情境（非實測）：人力單價 </a:t>
+            </a:r>
+            <a:r>
+              <a:rPr lang="en-US" altLang="zh-TW" sz="1320">
+                <a:solidFill>
+                  <a:srgbClr val="25323C"/>
+                </a:solidFill>
+                <a:latin typeface="Microsoft JhengHei" panose="020B0604030504040204" pitchFamily="34" charset="-120"/>
+              </a:rPr>
+              <a:t>NT$900</a:t>
+            </a:r>
+            <a:r>
+              <a:rPr lang="zh-TW" altLang="en-US" sz="1320">
+                <a:solidFill>
+                  <a:srgbClr val="25323C"/>
+                </a:solidFill>
+                <a:latin typeface="Microsoft JhengHei" panose="020B0604030504040204" pitchFamily="34" charset="-120"/>
+              </a:rPr>
+              <a:t>／小時；年工時價值＝年案件量 </a:t>
+            </a:r>
+            <a:r>
+              <a:rPr lang="en-US" altLang="zh-TW" sz="1320">
+                <a:solidFill>
+                  <a:srgbClr val="25323C"/>
+                </a:solidFill>
+                <a:latin typeface="Microsoft JhengHei" panose="020B0604030504040204" pitchFamily="34" charset="-120"/>
+              </a:rPr>
+              <a:t>× </a:t>
+            </a:r>
+            <a:r>
+              <a:rPr lang="zh-TW" altLang="en-US" sz="1320">
+                <a:solidFill>
+                  <a:srgbClr val="25323C"/>
+                </a:solidFill>
+                <a:latin typeface="Microsoft JhengHei" panose="020B0604030504040204" pitchFamily="34" charset="-120"/>
+              </a:rPr>
+              <a:t>每案節省分鐘 </a:t>
+            </a:r>
+            <a:r>
+              <a:rPr lang="en-US" altLang="zh-TW" sz="1320">
+                <a:solidFill>
+                  <a:srgbClr val="25323C"/>
+                </a:solidFill>
+                <a:latin typeface="Microsoft JhengHei" panose="020B0604030504040204" pitchFamily="34" charset="-120"/>
+              </a:rPr>
+              <a:t>÷ 60 × </a:t>
+            </a:r>
+            <a:r>
+              <a:rPr lang="zh-TW" altLang="en-US" sz="1320">
+                <a:solidFill>
+                  <a:srgbClr val="25323C"/>
+                </a:solidFill>
+                <a:latin typeface="Microsoft JhengHei" panose="020B0604030504040204" pitchFamily="34" charset="-120"/>
+              </a:rPr>
+              <a:t>人力單價。</a:t>
+            </a:r>
+          </a:p>
+        </p:txBody>
+      </p:sp>
+      <p:sp>
+        <p:nvSpPr>
+          <p:cNvPr id="46" name="文字方塊 45">
+            <a:extLst>
+              <a:ext uri="{FF2B5EF4-FFF2-40B4-BE49-F238E27FC236}">
+                <a16:creationId xmlns:a16="http://schemas.microsoft.com/office/drawing/2014/main" id="{6632A65C-5C29-C98F-5DD3-77B929936F0F}"/>
+              </a:ext>
+            </a:extLst>
+          </p:cNvPr>
+          <p:cNvSpPr txBox="1"/>
+          <p:nvPr/>
+        </p:nvSpPr>
+        <p:spPr>
+          <a:xfrm>
+            <a:off x="768096" y="4114800"/>
+            <a:ext cx="10607040" cy="425758"/>
+          </a:xfrm>
+          <a:prstGeom prst="rect">
+            <a:avLst/>
+          </a:prstGeom>
+          <a:noFill/>
+        </p:spPr>
+        <p:txBody>
+          <a:bodyPr vert="horz" lIns="38100" tIns="12700" rIns="38100" bIns="12700" rtlCol="0">
+            <a:spAutoFit/>
+          </a:bodyPr>
+          <a:lstStyle/>
+          <a:p>
+            <a:r>
+              <a:rPr lang="zh-TW" altLang="en-US" sz="1300">
+                <a:solidFill>
+                  <a:srgbClr val="25323C"/>
+                </a:solidFill>
+                <a:latin typeface="Microsoft JhengHei" panose="020B0604030504040204" pitchFamily="34" charset="-120"/>
+              </a:rPr>
+              <a:t>成本含增量授權、建置導入、維護與治理審查，金額待盤點。淨效益＝工時價值 − 年化總成本；損益兩平案件量＝年化總成本 </a:t>
+            </a:r>
+            <a:r>
+              <a:rPr lang="en-US" altLang="zh-TW" sz="1300">
+                <a:solidFill>
+                  <a:srgbClr val="25323C"/>
+                </a:solidFill>
+                <a:latin typeface="Microsoft JhengHei" panose="020B0604030504040204" pitchFamily="34" charset="-120"/>
+              </a:rPr>
+              <a:t>÷</a:t>
+            </a:r>
+            <a:r>
+              <a:rPr lang="zh-TW" altLang="en-US" sz="1300">
+                <a:solidFill>
+                  <a:srgbClr val="25323C"/>
+                </a:solidFill>
+                <a:latin typeface="Microsoft JhengHei" panose="020B0604030504040204" pitchFamily="34" charset="-120"/>
+              </a:rPr>
+              <a:t>（人力單價 </a:t>
+            </a:r>
+            <a:r>
+              <a:rPr lang="en-US" altLang="zh-TW" sz="1300">
+                <a:solidFill>
+                  <a:srgbClr val="25323C"/>
+                </a:solidFill>
+                <a:latin typeface="Microsoft JhengHei" panose="020B0604030504040204" pitchFamily="34" charset="-120"/>
+              </a:rPr>
+              <a:t>× </a:t>
+            </a:r>
+            <a:r>
+              <a:rPr lang="zh-TW" altLang="en-US" sz="1300">
+                <a:solidFill>
+                  <a:srgbClr val="25323C"/>
+                </a:solidFill>
+                <a:latin typeface="Microsoft JhengHei" panose="020B0604030504040204" pitchFamily="34" charset="-120"/>
+              </a:rPr>
+              <a:t>每案節省分鐘 </a:t>
+            </a:r>
+            <a:r>
+              <a:rPr lang="en-US" altLang="zh-TW" sz="1300">
+                <a:solidFill>
+                  <a:srgbClr val="25323C"/>
+                </a:solidFill>
+                <a:latin typeface="Microsoft JhengHei" panose="020B0604030504040204" pitchFamily="34" charset="-120"/>
+              </a:rPr>
+              <a:t>÷ 60</a:t>
+            </a:r>
+            <a:r>
+              <a:rPr lang="zh-TW" altLang="en-US" sz="1300">
+                <a:solidFill>
+                  <a:srgbClr val="25323C"/>
+                </a:solidFill>
+                <a:latin typeface="Microsoft JhengHei" panose="020B0604030504040204" pitchFamily="34" charset="-120"/>
+              </a:rPr>
+              <a:t>）。</a:t>
+            </a:r>
+          </a:p>
+        </p:txBody>
+      </p:sp>
+      <p:sp>
+        <p:nvSpPr>
+          <p:cNvPr id="47" name="文字方塊 46">
+            <a:extLst>
+              <a:ext uri="{FF2B5EF4-FFF2-40B4-BE49-F238E27FC236}">
+                <a16:creationId xmlns:a16="http://schemas.microsoft.com/office/drawing/2014/main" id="{83DCB08F-0CC5-F744-C795-62C6BE1E83DB}"/>
+              </a:ext>
+            </a:extLst>
+          </p:cNvPr>
+          <p:cNvSpPr txBox="1"/>
+          <p:nvPr/>
+        </p:nvSpPr>
+        <p:spPr>
+          <a:xfrm>
+            <a:off x="768096" y="5010912"/>
+            <a:ext cx="10607040" cy="205697"/>
+          </a:xfrm>
+          <a:prstGeom prst="rect">
+            <a:avLst/>
+          </a:prstGeom>
+          <a:noFill/>
+        </p:spPr>
+        <p:txBody>
+          <a:bodyPr vert="horz" lIns="38100" tIns="12700" rIns="38100" bIns="12700" rtlCol="0">
+            <a:spAutoFit/>
+          </a:bodyPr>
+          <a:lstStyle/>
+          <a:p>
+            <a:r>
+              <a:rPr lang="zh-TW" altLang="en-US" sz="1170">
+                <a:solidFill>
+                  <a:srgbClr val="25323C"/>
+                </a:solidFill>
+                <a:latin typeface="Microsoft JhengHei" panose="020B0604030504040204" pitchFamily="34" charset="-120"/>
+              </a:rPr>
+              <a:t>案件量、節省時間與單價須以銀行實測替換。</a:t>
+            </a:r>
+            <a:r>
+              <a:rPr lang="en-US" altLang="zh-TW" sz="1170">
+                <a:solidFill>
+                  <a:srgbClr val="25323C"/>
+                </a:solidFill>
+                <a:latin typeface="Microsoft JhengHei" panose="020B0604030504040204" pitchFamily="34" charset="-120"/>
+              </a:rPr>
+              <a:t>30 </a:t>
+            </a:r>
+            <a:r>
+              <a:rPr lang="zh-TW" altLang="en-US" sz="1170">
+                <a:solidFill>
+                  <a:srgbClr val="25323C"/>
+                </a:solidFill>
+                <a:latin typeface="Microsoft JhengHei" panose="020B0604030504040204" pitchFamily="34" charset="-120"/>
+              </a:rPr>
+              <a:t>項工具檢查通過與 </a:t>
+            </a:r>
+            <a:r>
+              <a:rPr lang="en-US" altLang="zh-TW" sz="1170">
+                <a:solidFill>
+                  <a:srgbClr val="25323C"/>
+                </a:solidFill>
+                <a:latin typeface="Microsoft JhengHei" panose="020B0604030504040204" pitchFamily="34" charset="-120"/>
+              </a:rPr>
+              <a:t>Formatter </a:t>
+            </a:r>
+            <a:r>
+              <a:rPr lang="zh-TW" altLang="en-US" sz="1170">
+                <a:solidFill>
+                  <a:srgbClr val="25323C"/>
+                </a:solidFill>
+                <a:latin typeface="Microsoft JhengHei" panose="020B0604030504040204" pitchFamily="34" charset="-120"/>
+              </a:rPr>
+              <a:t>微基準不代表人工節省；配對試次仍待完成。</a:t>
+            </a:r>
+          </a:p>
+        </p:txBody>
+      </p:sp>
+      <p:sp>
+        <p:nvSpPr>
+          <p:cNvPr id="5" name="文字方塊 4">
+            <a:extLst>
+              <a:ext uri="{FF2B5EF4-FFF2-40B4-BE49-F238E27FC236}">
+                <a16:creationId xmlns:a16="http://schemas.microsoft.com/office/drawing/2014/main" id="{BFA653E8-9FA6-F090-528E-411566F0F09A}"/>
+              </a:ext>
+            </a:extLst>
+          </p:cNvPr>
+          <p:cNvSpPr txBox="1"/>
+          <p:nvPr/>
+        </p:nvSpPr>
+        <p:spPr>
+          <a:xfrm>
+            <a:off x="548640" y="265176"/>
+            <a:ext cx="2743200" cy="173124"/>
+          </a:xfrm>
+          <a:prstGeom prst="rect">
+            <a:avLst/>
+          </a:prstGeom>
+          <a:noFill/>
+        </p:spPr>
+        <p:txBody>
+          <a:bodyPr vert="horz" lIns="0" tIns="0" rIns="0" bIns="0" rtlCol="0">
+            <a:spAutoFit/>
+          </a:bodyPr>
+          <a:lstStyle/>
+          <a:p>
+            <a:r>
+              <a:rPr lang="en-US" altLang="zh-TW" sz="1125" b="1">
+                <a:solidFill>
+                  <a:srgbClr val="202A33"/>
+                </a:solidFill>
+                <a:latin typeface="Microsoft JhengHei" panose="020B0604030504040204" pitchFamily="34" charset="-120"/>
+              </a:rPr>
+              <a:t>SQL SPA TOOLS</a:t>
+            </a:r>
+            <a:endParaRPr lang="zh-TW" altLang="en-US" sz="1125" b="1">
+              <a:solidFill>
+                <a:srgbClr val="202A33"/>
+              </a:solidFill>
+              <a:latin typeface="Microsoft JhengHei" panose="020B0604030504040204" pitchFamily="34" charset="-120"/>
+            </a:endParaRPr>
+          </a:p>
+        </p:txBody>
+      </p:sp>
+      <p:sp>
+        <p:nvSpPr>
+          <p:cNvPr id="6" name="矩形 5">
+            <a:extLst>
+              <a:ext uri="{FF2B5EF4-FFF2-40B4-BE49-F238E27FC236}">
+                <a16:creationId xmlns:a16="http://schemas.microsoft.com/office/drawing/2014/main" id="{FCAC94B1-1B65-C68B-400B-78F6E3075FAE}"/>
+              </a:ext>
+            </a:extLst>
+          </p:cNvPr>
+          <p:cNvSpPr/>
+          <p:nvPr/>
+        </p:nvSpPr>
+        <p:spPr>
+          <a:xfrm>
+            <a:off x="548640" y="1325880"/>
+            <a:ext cx="11100816" cy="28346"/>
+          </a:xfrm>
+          <a:prstGeom prst="rect">
+            <a:avLst/>
+          </a:prstGeom>
+          <a:solidFill>
+            <a:srgbClr val="70B7D5"/>
+          </a:solidFill>
+          <a:ln w="19050">
+            <a:noFill/>
+            <a:prstDash val="solid"/>
+          </a:ln>
+          <a:effectLst/>
+          <a:extLst>
+            <a:ext uri="{91240B29-F687-4F45-9708-019B960494DF}">
+              <a14:hiddenLine xmlns:a14="http://schemas.microsoft.com/office/drawing/2010/main" w="19050">
+                <a:solidFill>
+                  <a:schemeClr val="accent1">
+                    <a:shade val="15000"/>
+                  </a:schemeClr>
+                </a:solidFill>
+                <a:prstDash val="solid"/>
+              </a14:hiddenLine>
+            </a:ext>
+          </a:extLst>
+        </p:spPr>
+        <p:style>
+          <a:lnRef idx="2">
+            <a:schemeClr val="accent1">
+              <a:shade val="15000"/>
+            </a:schemeClr>
+          </a:lnRef>
+          <a:fillRef idx="1">
+            <a:schemeClr val="accent1"/>
+          </a:fillRef>
+          <a:effectRef idx="0">
+            <a:schemeClr val="accent1"/>
+          </a:effectRef>
+          <a:fontRef idx="minor">
+            <a:schemeClr val="lt1"/>
+          </a:fontRef>
+        </p:style>
+        <p:txBody>
+          <a:bodyPr rtlCol="0" anchor="ctr"/>
+          <a:lstStyle/>
+          <a:p>
+            <a:pPr algn="ctr"/>
+            <a:endParaRPr lang="zh-TW" altLang="en-US"/>
+          </a:p>
+        </p:txBody>
+      </p:sp>
+      <p:sp>
+        <p:nvSpPr>
+          <p:cNvPr id="7" name="矩形 6">
+            <a:extLst>
+              <a:ext uri="{FF2B5EF4-FFF2-40B4-BE49-F238E27FC236}">
+                <a16:creationId xmlns:a16="http://schemas.microsoft.com/office/drawing/2014/main" id="{F2D4D8EE-C0AD-506A-501B-9CA084134AA8}"/>
+              </a:ext>
+            </a:extLst>
+          </p:cNvPr>
+          <p:cNvSpPr/>
+          <p:nvPr/>
+        </p:nvSpPr>
+        <p:spPr>
+          <a:xfrm>
+            <a:off x="685800" y="4837176"/>
+            <a:ext cx="10561320" cy="9144"/>
+          </a:xfrm>
+          <a:prstGeom prst="rect">
+            <a:avLst/>
+          </a:prstGeom>
+          <a:solidFill>
+            <a:srgbClr val="D8E0E6"/>
+          </a:solidFill>
+          <a:ln w="19050">
+            <a:noFill/>
+            <a:prstDash val="solid"/>
+          </a:ln>
+          <a:effectLst/>
+          <a:extLst>
+            <a:ext uri="{91240B29-F687-4F45-9708-019B960494DF}">
+              <a14:hiddenLine xmlns:a14="http://schemas.microsoft.com/office/drawing/2010/main" w="19050">
+                <a:solidFill>
+                  <a:schemeClr val="accent1">
+                    <a:shade val="15000"/>
+                  </a:schemeClr>
+                </a:solidFill>
+                <a:prstDash val="solid"/>
+              </a14:hiddenLine>
+            </a:ext>
+          </a:extLst>
+        </p:spPr>
+        <p:style>
+          <a:lnRef idx="2">
+            <a:schemeClr val="accent1">
+              <a:shade val="15000"/>
+            </a:schemeClr>
+          </a:lnRef>
+          <a:fillRef idx="1">
+            <a:schemeClr val="accent1"/>
+          </a:fillRef>
+          <a:effectRef idx="0">
+            <a:schemeClr val="accent1"/>
+          </a:effectRef>
+          <a:fontRef idx="minor">
+            <a:schemeClr val="lt1"/>
+          </a:fontRef>
+        </p:style>
+        <p:txBody>
+          <a:bodyPr rtlCol="0" anchor="ctr"/>
+          <a:lstStyle/>
+          <a:p>
+            <a:pPr algn="ctr"/>
+            <a:endParaRPr lang="zh-TW" altLang="en-US"/>
+          </a:p>
+        </p:txBody>
+      </p:sp>
+      <p:sp>
+        <p:nvSpPr>
+          <p:cNvPr id="8" name="文字方塊 7">
+            <a:extLst>
+              <a:ext uri="{FF2B5EF4-FFF2-40B4-BE49-F238E27FC236}">
+                <a16:creationId xmlns:a16="http://schemas.microsoft.com/office/drawing/2014/main" id="{9970F139-5475-376B-60A1-4FCFF8EFB9F5}"/>
+              </a:ext>
+            </a:extLst>
+          </p:cNvPr>
+          <p:cNvSpPr txBox="1"/>
+          <p:nvPr/>
+        </p:nvSpPr>
+        <p:spPr>
+          <a:xfrm>
+            <a:off x="658368" y="6473952"/>
+            <a:ext cx="7315200" cy="138499"/>
+          </a:xfrm>
+          <a:prstGeom prst="rect">
+            <a:avLst/>
+          </a:prstGeom>
+          <a:noFill/>
+        </p:spPr>
+        <p:txBody>
+          <a:bodyPr vert="horz" lIns="0" tIns="0" rIns="0" bIns="0" rtlCol="0">
+            <a:spAutoFit/>
+          </a:bodyPr>
+          <a:lstStyle/>
+          <a:p>
+            <a:r>
+              <a:rPr lang="zh-TW" altLang="en-US" sz="900">
+                <a:solidFill>
+                  <a:srgbClr val="202A33"/>
+                </a:solidFill>
+                <a:latin typeface="Microsoft JhengHei" panose="020B0604030504040204" pitchFamily="34" charset="-120"/>
+              </a:rPr>
+              <a:t>鎖頭銀行 </a:t>
+            </a:r>
+            <a:r>
+              <a:rPr lang="en-US" altLang="zh-TW" sz="900">
+                <a:solidFill>
+                  <a:srgbClr val="202A33"/>
+                </a:solidFill>
+                <a:latin typeface="Microsoft JhengHei" panose="020B0604030504040204" pitchFamily="34" charset="-120"/>
+              </a:rPr>
+              <a:t>M365 COPILOT </a:t>
+            </a:r>
+            <a:r>
+              <a:rPr lang="zh-TW" altLang="en-US" sz="900">
+                <a:solidFill>
+                  <a:srgbClr val="202A33"/>
+                </a:solidFill>
+                <a:latin typeface="Microsoft JhengHei" panose="020B0604030504040204" pitchFamily="34" charset="-120"/>
+              </a:rPr>
+              <a:t>黑客松  </a:t>
+            </a:r>
+            <a:r>
+              <a:rPr lang="en-US" altLang="zh-TW" sz="900">
+                <a:solidFill>
+                  <a:srgbClr val="202A33"/>
+                </a:solidFill>
+                <a:latin typeface="Microsoft JhengHei" panose="020B0604030504040204" pitchFamily="34" charset="-120"/>
+              </a:rPr>
+              <a:t>•  2026.10  |  08</a:t>
+            </a:r>
+            <a:endParaRPr lang="zh-TW" altLang="en-US" sz="900">
+              <a:solidFill>
+                <a:srgbClr val="202A33"/>
+              </a:solidFill>
+              <a:latin typeface="Microsoft JhengHei" panose="020B0604030504040204" pitchFamily="34" charset="-120"/>
             </a:endParaRPr>
           </a:p>
         </p:txBody>

--- a/參賽準備/參賽文件/SQL_SPA_Tools_競賽簡報.pptx
+++ b/參賽準備/參賽文件/SQL_SPA_Tools_競賽簡報.pptx
@@ -4643,6 +4643,108 @@
           </a:p>
         </p:txBody>
       </p:sp>
+      <p:sp>
+        <p:nvSpPr>
+          <p:cNvPr id="10" name="LogoBackground">
+            <a:extLst>
+              <a:ext uri="{FF2B5EF4-FFF2-40B4-BE49-F238E27FC236}">
+                <a16:creationId xmlns:a16="http://schemas.microsoft.com/office/drawing/2014/main" id="{21CBEDEE-312E-5131-D295-6E9D1870ABA2}"/>
+              </a:ext>
+            </a:extLst>
+          </p:cNvPr>
+          <p:cNvSpPr/>
+          <p:nvPr/>
+        </p:nvSpPr>
+        <p:spPr>
+          <a:xfrm>
+            <a:off x="8064500" y="1587500"/>
+            <a:ext cx="3746500" cy="1333500"/>
+          </a:xfrm>
+          <a:prstGeom prst="rect">
+            <a:avLst/>
+          </a:prstGeom>
+          <a:solidFill>
+            <a:srgbClr val="F7FAFC"/>
+          </a:solidFill>
+          <a:ln w="19050">
+            <a:noFill/>
+            <a:prstDash val="solid"/>
+          </a:ln>
+          <a:effectLst/>
+          <a:extLst>
+            <a:ext uri="{91240B29-F687-4F45-9708-019B960494DF}">
+              <a14:hiddenLine xmlns:a14="http://schemas.microsoft.com/office/drawing/2010/main" w="19050">
+                <a:solidFill>
+                  <a:schemeClr val="accent1">
+                    <a:shade val="15000"/>
+                  </a:schemeClr>
+                </a:solidFill>
+                <a:prstDash val="solid"/>
+              </a14:hiddenLine>
+            </a:ext>
+          </a:extLst>
+        </p:spPr>
+        <p:style>
+          <a:lnRef idx="2">
+            <a:schemeClr val="accent1">
+              <a:shade val="15000"/>
+            </a:schemeClr>
+          </a:lnRef>
+          <a:fillRef idx="1">
+            <a:schemeClr val="accent1"/>
+          </a:fillRef>
+          <a:effectRef idx="0">
+            <a:schemeClr val="accent1"/>
+          </a:effectRef>
+          <a:fontRef idx="minor">
+            <a:schemeClr val="lt1"/>
+          </a:fontRef>
+        </p:style>
+        <p:txBody>
+          <a:bodyPr rtlCol="0" anchor="ctr"/>
+          <a:lstStyle/>
+          <a:p>
+            <a:pPr algn="ctr"/>
+            <a:endParaRPr lang="zh-TW" altLang="en-US"/>
+          </a:p>
+        </p:txBody>
+      </p:sp>
+      <p:pic>
+        <p:nvPicPr>
+          <p:cNvPr id="12" name="LockholderBankLogo">
+            <a:extLst>
+              <a:ext uri="{FF2B5EF4-FFF2-40B4-BE49-F238E27FC236}">
+                <a16:creationId xmlns:a16="http://schemas.microsoft.com/office/drawing/2014/main" id="{9C3821F0-FA7F-41FC-8094-E1CF6499AD8C}"/>
+              </a:ext>
+            </a:extLst>
+          </p:cNvPr>
+          <p:cNvPicPr>
+            <a:picLocks noChangeAspect="1"/>
+          </p:cNvPicPr>
+          <p:nvPr/>
+        </p:nvPicPr>
+        <p:blipFill>
+          <a:blip r:embed="rId3">
+            <a:extLst>
+              <a:ext uri="{28A0092B-C50C-407E-A947-70E740481C1C}">
+                <a14:useLocalDpi xmlns:a14="http://schemas.microsoft.com/office/drawing/2010/main" val="0"/>
+              </a:ext>
+            </a:extLst>
+          </a:blip>
+          <a:stretch>
+            <a:fillRect/>
+          </a:stretch>
+        </p:blipFill>
+        <p:spPr>
+          <a:xfrm>
+            <a:off x="8216900" y="1765300"/>
+            <a:ext cx="3441700" cy="1075563"/>
+          </a:xfrm>
+          <a:prstGeom prst="rect">
+            <a:avLst/>
+          </a:prstGeom>
+        </p:spPr>
+      </p:pic>
     </p:spTree>
     <p:extLst>
       <p:ext uri="{BB962C8B-B14F-4D97-AF65-F5344CB8AC3E}">
